--- a/content/decks/media-studies/media-studies-s1-lesson-03-camera.pptx
+++ b/content/decks/media-studies/media-studies-s1-lesson-03-camera.pptx
@@ -17,9 +17,11 @@
     <p:sldId id="265" r:id="rId11"/>
     <p:sldId id="266" r:id="rId12"/>
     <p:sldId id="267" r:id="rId13"/>
+    <p:sldId id="268" r:id="rId14"/>
+    <p:sldId id="269" r:id="rId15"/>
   </p:sldIdLst>
   <p:notesMasterIdLst>
-    <p:notesMasterId r:id="rId14"/>
+    <p:notesMasterId r:id="rId16"/>
   </p:notesMasterIdLst>
   <p:sldSz cx="12192000" cy="6858000"/>
   <p:notesSz cx="6858000" cy="12192000"/>
@@ -601,7 +603,7 @@
           <a:p>
             <a:r>
               <a:rPr lang="en-US" dirty="0"/>
-              <a:t/>
+              <a:t>The production still shows what a camera movement costs: track laid on sand, lights rigged at noon. The dolly zoom is two movements cancelling: the lens zooms out as the dolly pushes in, so Brody holds size while the background rushes away. Dir. Steven Spielberg.</a:t>
             </a:r>
             <a:endParaRPr lang="en-US" dirty="0"/>
           </a:p>
@@ -689,7 +691,7 @@
           <a:p>
             <a:r>
               <a:rPr lang="en-US" dirty="0"/>
-              <a:t>Phones are fine and often better: all three controls exist on a phone. Circulate with one question only: what is that shot doing?</a:t>
+              <a:t/>
             </a:r>
             <a:endParaRPr lang="en-US" dirty="0"/>
           </a:p>
@@ -819,6 +821,182 @@
 </p:notes>
 </file>
 
+<file path=ppt/notesSlides/notesSlide13.xml><?xml version="1.0" encoding="utf-8"?>
+<p:notes xmlns:a="http://schemas.openxmlformats.org/drawingml/2006/main" xmlns:r="http://schemas.openxmlformats.org/officeDocument/2006/relationships" xmlns:p="http://schemas.openxmlformats.org/presentationml/2006/main">
+  <p:cSld>
+    <p:spTree>
+      <p:nvGrpSpPr>
+        <p:cNvPr id="1" name=""/>
+        <p:cNvGrpSpPr/>
+        <p:nvPr/>
+      </p:nvGrpSpPr>
+      <p:grpSpPr>
+        <a:xfrm>
+          <a:off x="0" y="0"/>
+          <a:ext cx="0" cy="0"/>
+          <a:chOff x="0" y="0"/>
+          <a:chExt cx="0" cy="0"/>
+        </a:xfrm>
+      </p:grpSpPr>
+      <p:sp>
+        <p:nvSpPr>
+          <p:cNvPr id="2" name="Slide Image Placeholder 1"/>
+          <p:cNvSpPr>
+            <a:spLocks noGrp="1" noRot="1" noChangeAspect="1"/>
+          </p:cNvSpPr>
+          <p:nvPr>
+            <p:ph type="sldImg"/>
+          </p:nvPr>
+        </p:nvSpPr>
+        <p:spPr/>
+      </p:sp>
+      <p:sp>
+        <p:nvSpPr>
+          <p:cNvPr id="3" name="Notes Placeholder 2"/>
+          <p:cNvSpPr>
+            <a:spLocks noGrp="1"/>
+          </p:cNvSpPr>
+          <p:nvPr>
+            <p:ph type="body" idx="1"/>
+          </p:nvPr>
+        </p:nvSpPr>
+        <p:spPr/>
+        <p:txBody>
+          <a:bodyPr/>
+          <a:lstStyle/>
+          <a:p>
+            <a:r>
+              <a:rPr lang="en-US" dirty="0"/>
+              <a:t>Phones are fine and often better: all three controls exist on a phone. Circulate with one question only: what is that shot doing?</a:t>
+            </a:r>
+            <a:endParaRPr lang="en-US" dirty="0"/>
+          </a:p>
+        </p:txBody>
+      </p:sp>
+      <p:sp>
+        <p:nvSpPr>
+          <p:cNvPr id="4" name="Slide Number Placeholder 3"/>
+          <p:cNvSpPr>
+            <a:spLocks noGrp="1"/>
+          </p:cNvSpPr>
+          <p:nvPr>
+            <p:ph type="sldNum" sz="quarter" idx="10"/>
+          </p:nvPr>
+        </p:nvSpPr>
+        <p:spPr/>
+        <p:txBody>
+          <a:bodyPr/>
+          <a:lstStyle/>
+          <a:p>
+            <a:fld id="{F7021451-1387-4CA6-816F-3879F97B5CBC}" type="slidenum">
+              <a:rPr lang="en-US"/>
+              <a:t>13</a:t>
+            </a:fld>
+            <a:endParaRPr lang="en-US"/>
+          </a:p>
+        </p:txBody>
+      </p:sp>
+    </p:spTree>
+    <p:extLst>
+      <p:ext uri="{BB962C8B-B14F-4D97-AF65-F5344CB8AC3E}">
+        <p14:creationId xmlns:p14="http://schemas.microsoft.com/office/powerpoint/2010/main" val="1024086991"/>
+      </p:ext>
+    </p:extLst>
+  </p:cSld>
+  <p:clrMapOvr>
+    <a:masterClrMapping/>
+  </p:clrMapOvr>
+</p:notes>
+</file>
+
+<file path=ppt/notesSlides/notesSlide14.xml><?xml version="1.0" encoding="utf-8"?>
+<p:notes xmlns:a="http://schemas.openxmlformats.org/drawingml/2006/main" xmlns:r="http://schemas.openxmlformats.org/officeDocument/2006/relationships" xmlns:p="http://schemas.openxmlformats.org/presentationml/2006/main">
+  <p:cSld>
+    <p:spTree>
+      <p:nvGrpSpPr>
+        <p:cNvPr id="1" name=""/>
+        <p:cNvGrpSpPr/>
+        <p:nvPr/>
+      </p:nvGrpSpPr>
+      <p:grpSpPr>
+        <a:xfrm>
+          <a:off x="0" y="0"/>
+          <a:ext cx="0" cy="0"/>
+          <a:chOff x="0" y="0"/>
+          <a:chExt cx="0" cy="0"/>
+        </a:xfrm>
+      </p:grpSpPr>
+      <p:sp>
+        <p:nvSpPr>
+          <p:cNvPr id="2" name="Slide Image Placeholder 1"/>
+          <p:cNvSpPr>
+            <a:spLocks noGrp="1" noRot="1" noChangeAspect="1"/>
+          </p:cNvSpPr>
+          <p:nvPr>
+            <p:ph type="sldImg"/>
+          </p:nvPr>
+        </p:nvSpPr>
+        <p:spPr/>
+      </p:sp>
+      <p:sp>
+        <p:nvSpPr>
+          <p:cNvPr id="3" name="Notes Placeholder 2"/>
+          <p:cNvSpPr>
+            <a:spLocks noGrp="1"/>
+          </p:cNvSpPr>
+          <p:nvPr>
+            <p:ph type="body" idx="1"/>
+          </p:nvPr>
+        </p:nvSpPr>
+        <p:spPr/>
+        <p:txBody>
+          <a:bodyPr/>
+          <a:lstStyle/>
+          <a:p>
+            <a:r>
+              <a:rPr lang="en-US" dirty="0"/>
+              <a:t/>
+            </a:r>
+            <a:endParaRPr lang="en-US" dirty="0"/>
+          </a:p>
+        </p:txBody>
+      </p:sp>
+      <p:sp>
+        <p:nvSpPr>
+          <p:cNvPr id="4" name="Slide Number Placeholder 3"/>
+          <p:cNvSpPr>
+            <a:spLocks noGrp="1"/>
+          </p:cNvSpPr>
+          <p:nvPr>
+            <p:ph type="sldNum" sz="quarter" idx="10"/>
+          </p:nvPr>
+        </p:nvSpPr>
+        <p:spPr/>
+        <p:txBody>
+          <a:bodyPr/>
+          <a:lstStyle/>
+          <a:p>
+            <a:fld id="{F7021451-1387-4CA6-816F-3879F97B5CBC}" type="slidenum">
+              <a:rPr lang="en-US"/>
+              <a:t>14</a:t>
+            </a:fld>
+            <a:endParaRPr lang="en-US"/>
+          </a:p>
+        </p:txBody>
+      </p:sp>
+    </p:spTree>
+    <p:extLst>
+      <p:ext uri="{BB962C8B-B14F-4D97-AF65-F5344CB8AC3E}">
+        <p14:creationId xmlns:p14="http://schemas.microsoft.com/office/powerpoint/2010/main" val="1024086991"/>
+      </p:ext>
+    </p:extLst>
+  </p:cSld>
+  <p:clrMapOvr>
+    <a:masterClrMapping/>
+  </p:clrMapOvr>
+</p:notes>
+</file>
+
 <file path=ppt/notesSlides/notesSlide2.xml><?xml version="1.0" encoding="utf-8"?>
 <p:notes xmlns:a="http://schemas.openxmlformats.org/drawingml/2006/main" xmlns:r="http://schemas.openxmlformats.org/officeDocument/2006/relationships" xmlns:p="http://schemas.openxmlformats.org/presentationml/2006/main">
   <p:cSld>
@@ -1129,7 +1307,7 @@
           <a:p>
             <a:r>
               <a:rPr lang="en-US" dirty="0"/>
-              <a:t>High angle from a rooftop. Use it to separate the term from the effect: students can name high angle in a second, and the mark is in the sentence after that.</a:t>
+              <a:t>A true overhead: students can name high angle in a second, and the mark is in the sentence after that. The same film returns on the mise-en-scene deck, shot from the front.</a:t>
             </a:r>
             <a:endParaRPr lang="en-US" dirty="0"/>
           </a:p>
@@ -1481,7 +1659,7 @@
           <a:p>
             <a:r>
               <a:rPr lang="en-US" dirty="0"/>
-              <a:t/>
+              <a:t>Steadicam is on the movement list they just met. Name the verb: the camera glides with him, refuses to cut away. Then the effect: his access becomes ours, which is why the shot feels like privilege. Two frames from one continuous take, dir. Martin Scorsese.</a:t>
             </a:r>
             <a:endParaRPr lang="en-US" dirty="0"/>
           </a:p>
@@ -2140,7 +2318,7 @@
                 <a:ea typeface="Arial" pitchFamily="34" charset="-122"/>
                 <a:cs typeface="Arial" pitchFamily="34" charset="-120"/>
               </a:rPr>
-              <a:t>DELIVERABLE · CS3</a:t>
+              <a:t>THE MACHINERY OF A MOVE</a:t>
             </a:r>
             <a:endParaRPr lang="en-US" sz="1100" dirty="0"/>
           </a:p>
@@ -2179,7 +2357,7 @@
                 <a:ea typeface="Arial" pitchFamily="34" charset="-122"/>
                 <a:cs typeface="Arial" pitchFamily="34" charset="-120"/>
               </a:rPr>
-              <a:t>TUESDAY, THE WHOLE SESSION</a:t>
+              <a:t>EVERY MOVEMENT IS BUILT</a:t>
             </a:r>
             <a:endParaRPr lang="en-US" sz="1100" dirty="0"/>
           </a:p>
@@ -2216,24 +2394,24 @@
         </p:nvSpPr>
         <p:spPr>
           <a:xfrm>
-            <a:off x="822960" y="1188720"/>
-            <a:ext cx="10543032" cy="914400"/>
-          </a:xfrm>
-          <a:prstGeom prst="rect">
-            <a:avLst/>
-          </a:prstGeom>
-          <a:noFill/>
-          <a:ln/>
-        </p:spPr>
-        <p:txBody>
-          <a:bodyPr wrap="square" lIns="0" tIns="0" rIns="0" bIns="0" rtlCol="0" anchor="ctr"/>
-          <a:lstStyle/>
-          <a:p>
-            <a:pPr indent="0" marL="0">
-              <a:buNone/>
-            </a:pPr>
-            <a:r>
-              <a:rPr lang="en-US" sz="3600" dirty="0">
+            <a:off x="822960" y="932688"/>
+            <a:ext cx="10543032" cy="640080"/>
+          </a:xfrm>
+          <a:prstGeom prst="rect">
+            <a:avLst/>
+          </a:prstGeom>
+          <a:noFill/>
+          <a:ln/>
+        </p:spPr>
+        <p:txBody>
+          <a:bodyPr wrap="square" lIns="0" tIns="0" rIns="0" bIns="0" rtlCol="0" anchor="ctr"/>
+          <a:lstStyle/>
+          <a:p>
+            <a:pPr indent="0" marL="0">
+              <a:buNone/>
+            </a:pPr>
+            <a:r>
+              <a:rPr lang="en-US" sz="3000" dirty="0">
                 <a:solidFill>
                   <a:srgbClr val="24313F"/>
                 </a:solidFill>
@@ -2241,9 +2419,9 @@
                 <a:ea typeface="Georgia" pitchFamily="34" charset="-122"/>
                 <a:cs typeface="Georgia" pitchFamily="34" charset="-120"/>
               </a:rPr>
-              <a:t>Six shots, your kit, posted before you leave</a:t>
-            </a:r>
-            <a:endParaRPr lang="en-US" sz="3600" dirty="0"/>
+              <a:t>The rig, then what the rig buys</a:t>
+            </a:r>
+            <a:endParaRPr lang="en-US" sz="3000" dirty="0"/>
           </a:p>
         </p:txBody>
       </p:sp>
@@ -2255,7 +2433,183 @@
         </p:nvSpPr>
         <p:spPr>
           <a:xfrm>
-            <a:off x="822960" y="2377440"/>
+            <a:off x="822960" y="1691640"/>
+            <a:ext cx="6035040" cy="3566160"/>
+          </a:xfrm>
+          <a:prstGeom prst="rect">
+            <a:avLst/>
+          </a:prstGeom>
+          <a:solidFill>
+            <a:srgbClr val="FAF8F1"/>
+          </a:solidFill>
+          <a:ln w="9525">
+            <a:solidFill>
+              <a:srgbClr val="D9D4C4"/>
+            </a:solidFill>
+            <a:prstDash val="solid"/>
+          </a:ln>
+        </p:spPr>
+      </p:sp>
+      <p:pic>
+        <p:nvPicPr>
+          <p:cNvPr id="7" name="Image 0" descr="/Users/dogan/Documents/Vaults/Courses/wiki/classes/media-studies/decks/_build/img/jaws-bts.jpg">    </p:cNvPr>
+          <p:cNvPicPr>
+            <a:picLocks noChangeAspect="1"/>
+          </p:cNvPicPr>
+          <p:nvPr/>
+        </p:nvPicPr>
+        <p:blipFill>
+          <a:blip r:embed="rId1"/>
+          <a:stretch>
+            <a:fillRect/>
+          </a:stretch>
+        </p:blipFill>
+        <p:spPr>
+          <a:xfrm>
+            <a:off x="1342270" y="1819656"/>
+            <a:ext cx="4996420" cy="3310128"/>
+          </a:xfrm>
+          <a:prstGeom prst="rect">
+            <a:avLst/>
+          </a:prstGeom>
+        </p:spPr>
+      </p:pic>
+      <p:sp>
+        <p:nvSpPr>
+          <p:cNvPr id="8" name="Shape 5"/>
+          <p:cNvSpPr/>
+          <p:nvPr/>
+        </p:nvSpPr>
+        <p:spPr>
+          <a:xfrm>
+            <a:off x="7223760" y="1691640"/>
+            <a:ext cx="4114800" cy="3566160"/>
+          </a:xfrm>
+          <a:prstGeom prst="rect">
+            <a:avLst/>
+          </a:prstGeom>
+          <a:solidFill>
+            <a:srgbClr val="FAF8F1"/>
+          </a:solidFill>
+          <a:ln w="9525">
+            <a:solidFill>
+              <a:srgbClr val="D9D4C4"/>
+            </a:solidFill>
+            <a:prstDash val="solid"/>
+          </a:ln>
+        </p:spPr>
+      </p:sp>
+      <p:pic>
+        <p:nvPicPr>
+          <p:cNvPr id="9" name="Image 1" descr="/Users/dogan/Documents/Vaults/Courses/wiki/classes/media-studies/decks/_build/img/jaws-dollyzoom.jpg">    </p:cNvPr>
+          <p:cNvPicPr>
+            <a:picLocks noChangeAspect="1"/>
+          </p:cNvPicPr>
+          <p:nvPr/>
+        </p:nvPicPr>
+        <p:blipFill>
+          <a:blip r:embed="rId2"/>
+          <a:stretch>
+            <a:fillRect/>
+          </a:stretch>
+        </p:blipFill>
+        <p:spPr>
+          <a:xfrm>
+            <a:off x="7351776" y="2614536"/>
+            <a:ext cx="3858768" cy="1720367"/>
+          </a:xfrm>
+          <a:prstGeom prst="rect">
+            <a:avLst/>
+          </a:prstGeom>
+        </p:spPr>
+      </p:pic>
+      <p:sp>
+        <p:nvSpPr>
+          <p:cNvPr id="10" name="Text 6"/>
+          <p:cNvSpPr/>
+          <p:nvPr/>
+        </p:nvSpPr>
+        <p:spPr>
+          <a:xfrm>
+            <a:off x="822960" y="5330952"/>
+            <a:ext cx="6035040" cy="320040"/>
+          </a:xfrm>
+          <a:prstGeom prst="rect">
+            <a:avLst/>
+          </a:prstGeom>
+          <a:noFill/>
+          <a:ln/>
+        </p:spPr>
+        <p:txBody>
+          <a:bodyPr wrap="square" lIns="0" tIns="0" rIns="0" bIns="0" rtlCol="0" anchor="ctr"/>
+          <a:lstStyle/>
+          <a:p>
+            <a:pPr algn="ctr" indent="0" marL="0">
+              <a:buNone/>
+            </a:pPr>
+            <a:r>
+              <a:rPr lang="en-US" sz="1050" dirty="0">
+                <a:solidFill>
+                  <a:srgbClr val="7A7F72"/>
+                </a:solidFill>
+                <a:latin typeface="Arial" pitchFamily="34" charset="0"/>
+                <a:ea typeface="Arial" pitchFamily="34" charset="-122"/>
+                <a:cs typeface="Arial" pitchFamily="34" charset="-120"/>
+              </a:rPr>
+              <a:t>The beach set: lights, track, crew</a:t>
+            </a:r>
+            <a:endParaRPr lang="en-US" sz="1050" dirty="0"/>
+          </a:p>
+        </p:txBody>
+      </p:sp>
+      <p:sp>
+        <p:nvSpPr>
+          <p:cNvPr id="11" name="Text 7"/>
+          <p:cNvSpPr/>
+          <p:nvPr/>
+        </p:nvSpPr>
+        <p:spPr>
+          <a:xfrm>
+            <a:off x="7223760" y="5330952"/>
+            <a:ext cx="4114800" cy="320040"/>
+          </a:xfrm>
+          <a:prstGeom prst="rect">
+            <a:avLst/>
+          </a:prstGeom>
+          <a:noFill/>
+          <a:ln/>
+        </p:spPr>
+        <p:txBody>
+          <a:bodyPr wrap="square" lIns="0" tIns="0" rIns="0" bIns="0" rtlCol="0" anchor="ctr"/>
+          <a:lstStyle/>
+          <a:p>
+            <a:pPr algn="ctr" indent="0" marL="0">
+              <a:buNone/>
+            </a:pPr>
+            <a:r>
+              <a:rPr lang="en-US" sz="1050" dirty="0">
+                <a:solidFill>
+                  <a:srgbClr val="7A7F72"/>
+                </a:solidFill>
+                <a:latin typeface="Arial" pitchFamily="34" charset="0"/>
+                <a:ea typeface="Arial" pitchFamily="34" charset="-122"/>
+                <a:cs typeface="Arial" pitchFamily="34" charset="-120"/>
+              </a:rPr>
+              <a:t>The dolly zoom it was built for</a:t>
+            </a:r>
+            <a:endParaRPr lang="en-US" sz="1050" dirty="0"/>
+          </a:p>
+        </p:txBody>
+      </p:sp>
+      <p:sp>
+        <p:nvSpPr>
+          <p:cNvPr id="12" name="Shape 8"/>
+          <p:cNvSpPr/>
+          <p:nvPr/>
+        </p:nvSpPr>
+        <p:spPr>
+          <a:xfrm>
+            <a:off x="822960" y="5806440"/>
             <a:ext cx="914400" cy="0"/>
           </a:xfrm>
           <a:prstGeom prst="line">
@@ -2272,130 +2626,46 @@
       </p:sp>
       <p:sp>
         <p:nvSpPr>
-          <p:cNvPr id="7" name="Text 5"/>
-          <p:cNvSpPr/>
-          <p:nvPr/>
-        </p:nvSpPr>
-        <p:spPr>
-          <a:xfrm>
-            <a:off x="822960" y="2606040"/>
-            <a:ext cx="9875520" cy="1645920"/>
-          </a:xfrm>
-          <a:prstGeom prst="rect">
-            <a:avLst/>
-          </a:prstGeom>
-          <a:noFill/>
-          <a:ln/>
-        </p:spPr>
-        <p:txBody>
-          <a:bodyPr wrap="square" lIns="0" tIns="0" rIns="0" bIns="0" rtlCol="0" anchor="t"/>
-          <a:lstStyle/>
-          <a:p>
-            <a:pPr indent="0" marL="0">
-              <a:lnSpc>
-                <a:spcPts val="2700"/>
-              </a:lnSpc>
-              <a:buNone/>
-            </a:pPr>
-            <a:r>
-              <a:rPr lang="en-US" sz="1900" dirty="0">
-                <a:solidFill>
-                  <a:srgbClr val="24313F"/>
+          <p:cNvPr id="13" name="Text 9"/>
+          <p:cNvSpPr/>
+          <p:nvPr/>
+        </p:nvSpPr>
+        <p:spPr>
+          <a:xfrm>
+            <a:off x="822960" y="5943600"/>
+            <a:ext cx="10515600" cy="365760"/>
+          </a:xfrm>
+          <a:prstGeom prst="rect">
+            <a:avLst/>
+          </a:prstGeom>
+          <a:noFill/>
+          <a:ln/>
+        </p:spPr>
+        <p:txBody>
+          <a:bodyPr wrap="square" lIns="0" tIns="0" rIns="0" bIns="0" rtlCol="0" anchor="ctr"/>
+          <a:lstStyle/>
+          <a:p>
+            <a:pPr indent="0" marL="0">
+              <a:buNone/>
+            </a:pPr>
+            <a:r>
+              <a:rPr lang="en-US" sz="1350" i="1" dirty="0">
+                <a:solidFill>
+                  <a:srgbClr val="4A6B5D"/>
                 </a:solidFill>
                 <a:latin typeface="Georgia" pitchFamily="34" charset="0"/>
                 <a:ea typeface="Georgia" pitchFamily="34" charset="-122"/>
                 <a:cs typeface="Georgia" pitchFamily="34" charset="-120"/>
               </a:rPr>
-              <a:t>In pairs, to a six-frame storyboard you did not draw: an establishing shot, a mid shot on a character, a slow tilt up to reveal, a close-up on an object, a low angle on the same character, and a point-of-view shot. No plot, no acting, no takes. The exercise is the camera.</a:t>
-            </a:r>
-            <a:endParaRPr lang="en-US" sz="1900" dirty="0"/>
-          </a:p>
-        </p:txBody>
-      </p:sp>
-      <p:sp>
-        <p:nvSpPr>
-          <p:cNvPr id="8" name="Text 6"/>
-          <p:cNvSpPr/>
-          <p:nvPr/>
-        </p:nvSpPr>
-        <p:spPr>
-          <a:xfrm>
-            <a:off x="822960" y="4343400"/>
-            <a:ext cx="9875520" cy="914400"/>
-          </a:xfrm>
-          <a:prstGeom prst="rect">
-            <a:avLst/>
-          </a:prstGeom>
-          <a:noFill/>
-          <a:ln/>
-        </p:spPr>
-        <p:txBody>
-          <a:bodyPr wrap="square" lIns="0" tIns="0" rIns="0" bIns="0" rtlCol="0" anchor="t"/>
-          <a:lstStyle/>
-          <a:p>
-            <a:pPr indent="0" marL="0">
-              <a:lnSpc>
-                <a:spcPts val="2400"/>
-              </a:lnSpc>
-              <a:buNone/>
-            </a:pPr>
-            <a:r>
-              <a:rPr lang="en-US" sz="1700" i="1" dirty="0">
-                <a:solidFill>
-                  <a:srgbClr val="4A6B5D"/>
-                </a:solidFill>
-                <a:latin typeface="Georgia" pitchFamily="34" charset="0"/>
-                <a:ea typeface="Georgia" pitchFamily="34" charset="-122"/>
-                <a:cs typeface="Georgia" pitchFamily="34" charset="-120"/>
-              </a:rPr>
-              <a:t>One line of intention per shot, in the syllabus's own terms. Marked on terminology, the three controls, and the intention line. Not on how good the footage looks.</a:t>
-            </a:r>
-            <a:endParaRPr lang="en-US" sz="1700" dirty="0"/>
-          </a:p>
-        </p:txBody>
-      </p:sp>
-      <p:sp>
-        <p:nvSpPr>
-          <p:cNvPr id="9" name="Text 7"/>
-          <p:cNvSpPr/>
-          <p:nvPr/>
-        </p:nvSpPr>
-        <p:spPr>
-          <a:xfrm>
-            <a:off x="822960" y="5394960"/>
-            <a:ext cx="10241280" cy="457200"/>
-          </a:xfrm>
-          <a:prstGeom prst="rect">
-            <a:avLst/>
-          </a:prstGeom>
-          <a:noFill/>
-          <a:ln/>
-        </p:spPr>
-        <p:txBody>
-          <a:bodyPr wrap="square" lIns="0" tIns="0" rIns="0" bIns="0" rtlCol="0" anchor="ctr"/>
-          <a:lstStyle/>
-          <a:p>
-            <a:pPr indent="0" marL="0">
-              <a:buNone/>
-            </a:pPr>
-            <a:r>
-              <a:rPr lang="en-US" sz="1250" dirty="0">
-                <a:solidFill>
-                  <a:srgbClr val="7A7F72"/>
-                </a:solidFill>
-                <a:latin typeface="Arial" pitchFamily="34" charset="0"/>
-                <a:ea typeface="Arial" pitchFamily="34" charset="-122"/>
-                <a:cs typeface="Arial" pitchFamily="34" charset="-120"/>
-              </a:rPr>
-              <a:t>Posted and dated on your Component 1 blog. Under Cambridge's own portfolio structure this post is not practice for the portfolio. It is the portfolio.</a:t>
-            </a:r>
-            <a:endParaRPr lang="en-US" sz="1250" dirty="0"/>
-          </a:p>
-        </p:txBody>
-      </p:sp>
-      <p:sp>
-        <p:nvSpPr>
-          <p:cNvPr id="10" name="Shape 8"/>
+              <a:t>Jaws (1975): dolly in while zooming out. The world stretches behind a man who cannot move. Your reverse zoom is on the same list.</a:t>
+            </a:r>
+            <a:endParaRPr lang="en-US" sz="1350" dirty="0"/>
+          </a:p>
+        </p:txBody>
+      </p:sp>
+      <p:sp>
+        <p:nvSpPr>
+          <p:cNvPr id="14" name="Shape 10"/>
           <p:cNvSpPr/>
           <p:nvPr/>
         </p:nvSpPr>
@@ -2418,7 +2688,7 @@
       </p:sp>
       <p:sp>
         <p:nvSpPr>
-          <p:cNvPr id="11" name="Text 9"/>
+          <p:cNvPr id="15" name="Text 11"/>
           <p:cNvSpPr/>
           <p:nvPr/>
         </p:nvSpPr>
@@ -2457,7 +2727,7 @@
       </p:sp>
       <p:sp>
         <p:nvSpPr>
-          <p:cNvPr id="12" name="Text 10"/>
+          <p:cNvPr id="16" name="Text 12"/>
           <p:cNvSpPr/>
           <p:nvPr/>
         </p:nvSpPr>
@@ -2488,7 +2758,7 @@
                 <a:ea typeface="Georgia" pitchFamily="34" charset="-122"/>
                 <a:cs typeface="Georgia" pitchFamily="34" charset="-120"/>
               </a:rPr>
-              <a:t>05</a:t>
+              <a:t>06</a:t>
             </a:r>
             <a:endParaRPr lang="en-US" sz="1600" dirty="0"/>
           </a:p>
@@ -2505,6 +2775,181 @@
 <file path=ppt/slides/slide11.xml><?xml version="1.0" encoding="utf-8"?>
 <p:sld xmlns:a="http://schemas.openxmlformats.org/drawingml/2006/main" xmlns:r="http://schemas.openxmlformats.org/officeDocument/2006/relationships" xmlns:p="http://schemas.openxmlformats.org/presentationml/2006/main">
   <p:cSld name="Slide 11">
+    <p:bg>
+      <p:bgPr>
+        <a:solidFill>
+          <a:srgbClr val="E8EFE7"/>
+        </a:solidFill>
+      </p:bgPr>
+    </p:bg>
+    <p:spTree>
+      <p:nvGrpSpPr>
+        <p:cNvPr id="1" name=""/>
+        <p:cNvGrpSpPr/>
+        <p:nvPr/>
+      </p:nvGrpSpPr>
+      <p:grpSpPr>
+        <a:xfrm>
+          <a:off x="0" y="0"/>
+          <a:ext cx="0" cy="0"/>
+          <a:chOff x="0" y="0"/>
+          <a:chExt cx="0" cy="0"/>
+        </a:xfrm>
+      </p:grpSpPr>
+      <p:sp>
+        <p:nvSpPr>
+          <p:cNvPr id="2" name="Text 0"/>
+          <p:cNvSpPr/>
+          <p:nvPr/>
+        </p:nvSpPr>
+        <p:spPr>
+          <a:xfrm>
+            <a:off x="502920" y="548640"/>
+            <a:ext cx="1828800" cy="1828800"/>
+          </a:xfrm>
+          <a:prstGeom prst="rect">
+            <a:avLst/>
+          </a:prstGeom>
+          <a:noFill/>
+          <a:ln/>
+        </p:spPr>
+        <p:txBody>
+          <a:bodyPr wrap="square" lIns="0" tIns="0" rIns="0" bIns="0" rtlCol="0" anchor="t"/>
+          <a:lstStyle/>
+          <a:p>
+            <a:pPr indent="0" marL="0">
+              <a:buNone/>
+            </a:pPr>
+            <a:r>
+              <a:rPr lang="en-US" sz="20000" dirty="0">
+                <a:solidFill>
+                  <a:srgbClr val="A3C1AD"/>
+                </a:solidFill>
+                <a:latin typeface="Georgia" pitchFamily="34" charset="0"/>
+                <a:ea typeface="Georgia" pitchFamily="34" charset="-122"/>
+                <a:cs typeface="Georgia" pitchFamily="34" charset="-120"/>
+              </a:rPr>
+              <a:t>“</a:t>
+            </a:r>
+            <a:endParaRPr lang="en-US" sz="20000" dirty="0"/>
+          </a:p>
+        </p:txBody>
+      </p:sp>
+      <p:sp>
+        <p:nvSpPr>
+          <p:cNvPr id="3" name="Text 1"/>
+          <p:cNvSpPr/>
+          <p:nvPr/>
+        </p:nvSpPr>
+        <p:spPr>
+          <a:xfrm>
+            <a:off x="822960" y="1783080"/>
+            <a:ext cx="10424160" cy="3291840"/>
+          </a:xfrm>
+          <a:prstGeom prst="rect">
+            <a:avLst/>
+          </a:prstGeom>
+          <a:noFill/>
+          <a:ln/>
+        </p:spPr>
+        <p:txBody>
+          <a:bodyPr wrap="square" lIns="0" tIns="0" rIns="0" bIns="0" rtlCol="0" anchor="ctr"/>
+          <a:lstStyle/>
+          <a:p>
+            <a:pPr indent="0" marL="0">
+              <a:lnSpc>
+                <a:spcPts val="4600"/>
+              </a:lnSpc>
+              <a:buNone/>
+            </a:pPr>
+            <a:r>
+              <a:rPr lang="en-US" sz="3600" dirty="0">
+                <a:solidFill>
+                  <a:srgbClr val="24313F"/>
+                </a:solidFill>
+                <a:latin typeface="Georgia" pitchFamily="34" charset="0"/>
+                <a:ea typeface="Georgia" pitchFamily="34" charset="-122"/>
+                <a:cs typeface="Georgia" pitchFamily="34" charset="-120"/>
+              </a:rPr>
+              <a:t>A series of short, self-contained exercises with camera (or even phone) can combine technical elements with story elements.</a:t>
+            </a:r>
+            <a:endParaRPr lang="en-US" sz="3600" dirty="0"/>
+          </a:p>
+        </p:txBody>
+      </p:sp>
+      <p:sp>
+        <p:nvSpPr>
+          <p:cNvPr id="4" name="Shape 2"/>
+          <p:cNvSpPr/>
+          <p:nvPr/>
+        </p:nvSpPr>
+        <p:spPr>
+          <a:xfrm>
+            <a:off x="822960" y="5029200"/>
+            <a:ext cx="914400" cy="0"/>
+          </a:xfrm>
+          <a:prstGeom prst="line">
+            <a:avLst/>
+          </a:prstGeom>
+          <a:noFill/>
+          <a:ln w="31750">
+            <a:solidFill>
+              <a:srgbClr val="8C3A38"/>
+            </a:solidFill>
+            <a:prstDash val="solid"/>
+          </a:ln>
+        </p:spPr>
+      </p:sp>
+      <p:sp>
+        <p:nvSpPr>
+          <p:cNvPr id="5" name="Text 3"/>
+          <p:cNvSpPr/>
+          <p:nvPr/>
+        </p:nvSpPr>
+        <p:spPr>
+          <a:xfrm>
+            <a:off x="822960" y="5212080"/>
+            <a:ext cx="10058400" cy="457200"/>
+          </a:xfrm>
+          <a:prstGeom prst="rect">
+            <a:avLst/>
+          </a:prstGeom>
+          <a:noFill/>
+          <a:ln/>
+        </p:spPr>
+        <p:txBody>
+          <a:bodyPr wrap="square" lIns="0" tIns="0" rIns="0" bIns="0" rtlCol="0" anchor="ctr"/>
+          <a:lstStyle/>
+          <a:p>
+            <a:pPr indent="0" marL="0">
+              <a:buNone/>
+            </a:pPr>
+            <a:r>
+              <a:rPr lang="en-US" sz="1400" spc="100" kern="0" dirty="0">
+                <a:solidFill>
+                  <a:srgbClr val="4A6B5D"/>
+                </a:solidFill>
+                <a:latin typeface="Arial" pitchFamily="34" charset="0"/>
+                <a:ea typeface="Arial" pitchFamily="34" charset="-122"/>
+                <a:cs typeface="Arial" pitchFamily="34" charset="-120"/>
+              </a:rPr>
+              <a:t>Cambridge Scheme of Work, Foundation Portfolio</a:t>
+            </a:r>
+            <a:endParaRPr lang="en-US" sz="1400" dirty="0"/>
+          </a:p>
+        </p:txBody>
+      </p:sp>
+    </p:spTree>
+  </p:cSld>
+  <p:clrMapOvr>
+    <a:masterClrMapping/>
+  </p:clrMapOvr>
+</p:sld>
+</file>
+
+<file path=ppt/slides/slide12.xml><?xml version="1.0" encoding="utf-8"?>
+<p:sld xmlns:a="http://schemas.openxmlformats.org/drawingml/2006/main" xmlns:r="http://schemas.openxmlformats.org/officeDocument/2006/relationships" xmlns:p="http://schemas.openxmlformats.org/presentationml/2006/main">
+  <p:cSld name="Slide 12">
     <p:bg>
       <p:bgPr>
         <a:solidFill>
@@ -2559,7 +3004,7 @@
                 <a:ea typeface="Arial" pitchFamily="34" charset="-122"/>
                 <a:cs typeface="Arial" pitchFamily="34" charset="-120"/>
               </a:rPr>
-              <a:t>THREE CONTROLS, NON-NEGOTIABLE</a:t>
+              <a:t>DELIVERABLE · CS3</a:t>
             </a:r>
             <a:endParaRPr lang="en-US" sz="1100" dirty="0"/>
           </a:p>
@@ -2598,7 +3043,7 @@
                 <a:ea typeface="Arial" pitchFamily="34" charset="-122"/>
                 <a:cs typeface="Arial" pitchFamily="34" charset="-120"/>
               </a:rPr>
-              <a:t>EACH ONE IS A MARKING POINT</a:t>
+              <a:t>TUESDAY, THE WHOLE SESSION</a:t>
             </a:r>
             <a:endParaRPr lang="en-US" sz="1100" dirty="0"/>
           </a:p>
@@ -2635,24 +3080,24 @@
         </p:nvSpPr>
         <p:spPr>
           <a:xfrm>
-            <a:off x="822960" y="932688"/>
-            <a:ext cx="10543032" cy="640080"/>
-          </a:xfrm>
-          <a:prstGeom prst="rect">
-            <a:avLst/>
-          </a:prstGeom>
-          <a:noFill/>
-          <a:ln/>
-        </p:spPr>
-        <p:txBody>
-          <a:bodyPr wrap="square" lIns="0" tIns="0" rIns="0" bIns="0" rtlCol="0" anchor="ctr"/>
-          <a:lstStyle/>
-          <a:p>
-            <a:pPr indent="0" marL="0">
-              <a:buNone/>
-            </a:pPr>
-            <a:r>
-              <a:rPr lang="en-US" sz="3200" dirty="0">
+            <a:off x="822960" y="1188720"/>
+            <a:ext cx="10543032" cy="914400"/>
+          </a:xfrm>
+          <a:prstGeom prst="rect">
+            <a:avLst/>
+          </a:prstGeom>
+          <a:noFill/>
+          <a:ln/>
+        </p:spPr>
+        <p:txBody>
+          <a:bodyPr wrap="square" lIns="0" tIns="0" rIns="0" bIns="0" rtlCol="0" anchor="ctr"/>
+          <a:lstStyle/>
+          <a:p>
+            <a:pPr indent="0" marL="0">
+              <a:buNone/>
+            </a:pPr>
+            <a:r>
+              <a:rPr lang="en-US" sz="3600" dirty="0">
                 <a:solidFill>
                   <a:srgbClr val="24313F"/>
                 </a:solidFill>
@@ -2660,77 +3105,106 @@
                 <a:ea typeface="Georgia" pitchFamily="34" charset="-122"/>
                 <a:cs typeface="Georgia" pitchFamily="34" charset="-120"/>
               </a:rPr>
-              <a:t>What actually kills student footage</a:t>
-            </a:r>
-            <a:endParaRPr lang="en-US" sz="3200" dirty="0"/>
-          </a:p>
-        </p:txBody>
-      </p:sp>
-      <p:sp>
-        <p:nvSpPr>
-          <p:cNvPr id="6" name="Text 4"/>
-          <p:cNvSpPr/>
-          <p:nvPr/>
-        </p:nvSpPr>
-        <p:spPr>
-          <a:xfrm>
-            <a:off x="822960" y="1828800"/>
-            <a:ext cx="914400" cy="457200"/>
-          </a:xfrm>
-          <a:prstGeom prst="rect">
-            <a:avLst/>
-          </a:prstGeom>
-          <a:noFill/>
-          <a:ln/>
-        </p:spPr>
-        <p:txBody>
-          <a:bodyPr wrap="square" lIns="0" tIns="0" rIns="0" bIns="0" rtlCol="0" anchor="ctr"/>
-          <a:lstStyle/>
-          <a:p>
-            <a:pPr indent="0" marL="0">
-              <a:buNone/>
-            </a:pPr>
-            <a:r>
-              <a:rPr lang="en-US" sz="2800" dirty="0">
-                <a:solidFill>
-                  <a:srgbClr val="A3C1AD"/>
+              <a:t>Six shots, your kit, posted before you leave</a:t>
+            </a:r>
+            <a:endParaRPr lang="en-US" sz="3600" dirty="0"/>
+          </a:p>
+        </p:txBody>
+      </p:sp>
+      <p:sp>
+        <p:nvSpPr>
+          <p:cNvPr id="6" name="Shape 4"/>
+          <p:cNvSpPr/>
+          <p:nvPr/>
+        </p:nvSpPr>
+        <p:spPr>
+          <a:xfrm>
+            <a:off x="822960" y="2377440"/>
+            <a:ext cx="914400" cy="0"/>
+          </a:xfrm>
+          <a:prstGeom prst="line">
+            <a:avLst/>
+          </a:prstGeom>
+          <a:noFill/>
+          <a:ln w="31750">
+            <a:solidFill>
+              <a:srgbClr val="8C3A38"/>
+            </a:solidFill>
+            <a:prstDash val="solid"/>
+          </a:ln>
+        </p:spPr>
+      </p:sp>
+      <p:sp>
+        <p:nvSpPr>
+          <p:cNvPr id="7" name="Text 5"/>
+          <p:cNvSpPr/>
+          <p:nvPr/>
+        </p:nvSpPr>
+        <p:spPr>
+          <a:xfrm>
+            <a:off x="822960" y="2606040"/>
+            <a:ext cx="9875520" cy="1645920"/>
+          </a:xfrm>
+          <a:prstGeom prst="rect">
+            <a:avLst/>
+          </a:prstGeom>
+          <a:noFill/>
+          <a:ln/>
+        </p:spPr>
+        <p:txBody>
+          <a:bodyPr wrap="square" lIns="0" tIns="0" rIns="0" bIns="0" rtlCol="0" anchor="t"/>
+          <a:lstStyle/>
+          <a:p>
+            <a:pPr indent="0" marL="0">
+              <a:lnSpc>
+                <a:spcPts val="2700"/>
+              </a:lnSpc>
+              <a:buNone/>
+            </a:pPr>
+            <a:r>
+              <a:rPr lang="en-US" sz="1900" dirty="0">
+                <a:solidFill>
+                  <a:srgbClr val="24313F"/>
                 </a:solidFill>
                 <a:latin typeface="Georgia" pitchFamily="34" charset="0"/>
                 <a:ea typeface="Georgia" pitchFamily="34" charset="-122"/>
                 <a:cs typeface="Georgia" pitchFamily="34" charset="-120"/>
               </a:rPr>
-              <a:t>01</a:t>
-            </a:r>
-            <a:endParaRPr lang="en-US" sz="2800" dirty="0"/>
-          </a:p>
-        </p:txBody>
-      </p:sp>
-      <p:sp>
-        <p:nvSpPr>
-          <p:cNvPr id="7" name="Text 5"/>
-          <p:cNvSpPr/>
-          <p:nvPr/>
-        </p:nvSpPr>
-        <p:spPr>
-          <a:xfrm>
-            <a:off x="822960" y="2331720"/>
-            <a:ext cx="3209544" cy="475488"/>
-          </a:xfrm>
-          <a:prstGeom prst="rect">
-            <a:avLst/>
-          </a:prstGeom>
-          <a:noFill/>
-          <a:ln/>
-        </p:spPr>
-        <p:txBody>
-          <a:bodyPr wrap="square" lIns="0" tIns="0" rIns="0" bIns="0" rtlCol="0" anchor="ctr"/>
-          <a:lstStyle/>
-          <a:p>
-            <a:pPr indent="0" marL="0">
-              <a:buNone/>
-            </a:pPr>
-            <a:r>
-              <a:rPr lang="en-US" sz="2200" dirty="0">
+              <a:t>In pairs, to a six-frame storyboard you did not draw: an establishing shot, a mid shot on a character, a slow tilt up to reveal, a close-up on an object, a low angle on the same character, and a point-of-view shot. No plot, no acting, no takes. The exercise is the camera.</a:t>
+            </a:r>
+            <a:endParaRPr lang="en-US" sz="1900" dirty="0"/>
+          </a:p>
+        </p:txBody>
+      </p:sp>
+      <p:sp>
+        <p:nvSpPr>
+          <p:cNvPr id="8" name="Text 6"/>
+          <p:cNvSpPr/>
+          <p:nvPr/>
+        </p:nvSpPr>
+        <p:spPr>
+          <a:xfrm>
+            <a:off x="822960" y="4343400"/>
+            <a:ext cx="9875520" cy="914400"/>
+          </a:xfrm>
+          <a:prstGeom prst="rect">
+            <a:avLst/>
+          </a:prstGeom>
+          <a:noFill/>
+          <a:ln/>
+        </p:spPr>
+        <p:txBody>
+          <a:bodyPr wrap="square" lIns="0" tIns="0" rIns="0" bIns="0" rtlCol="0" anchor="t"/>
+          <a:lstStyle/>
+          <a:p>
+            <a:pPr indent="0" marL="0">
+              <a:lnSpc>
+                <a:spcPts val="2400"/>
+              </a:lnSpc>
+              <a:buNone/>
+            </a:pPr>
+            <a:r>
+              <a:rPr lang="en-US" sz="1700" i="1" dirty="0">
                 <a:solidFill>
                   <a:srgbClr val="4A6B5D"/>
                 </a:solidFill>
@@ -2738,22 +3212,61 @@
                 <a:ea typeface="Georgia" pitchFamily="34" charset="-122"/>
                 <a:cs typeface="Georgia" pitchFamily="34" charset="-120"/>
               </a:rPr>
-              <a:t>Hold focus</a:t>
-            </a:r>
-            <a:endParaRPr lang="en-US" sz="2200" dirty="0"/>
-          </a:p>
-        </p:txBody>
-      </p:sp>
-      <p:sp>
-        <p:nvSpPr>
-          <p:cNvPr id="8" name="Shape 6"/>
-          <p:cNvSpPr/>
-          <p:nvPr/>
-        </p:nvSpPr>
-        <p:spPr>
-          <a:xfrm>
-            <a:off x="822960" y="2871216"/>
-            <a:ext cx="3209544" cy="0"/>
+              <a:t>One line of intention per shot, in the syllabus's own terms. Marked on terminology, the three controls, and the intention line. Not on how good the footage looks.</a:t>
+            </a:r>
+            <a:endParaRPr lang="en-US" sz="1700" dirty="0"/>
+          </a:p>
+        </p:txBody>
+      </p:sp>
+      <p:sp>
+        <p:nvSpPr>
+          <p:cNvPr id="9" name="Text 7"/>
+          <p:cNvSpPr/>
+          <p:nvPr/>
+        </p:nvSpPr>
+        <p:spPr>
+          <a:xfrm>
+            <a:off x="822960" y="5394960"/>
+            <a:ext cx="10241280" cy="457200"/>
+          </a:xfrm>
+          <a:prstGeom prst="rect">
+            <a:avLst/>
+          </a:prstGeom>
+          <a:noFill/>
+          <a:ln/>
+        </p:spPr>
+        <p:txBody>
+          <a:bodyPr wrap="square" lIns="0" tIns="0" rIns="0" bIns="0" rtlCol="0" anchor="ctr"/>
+          <a:lstStyle/>
+          <a:p>
+            <a:pPr indent="0" marL="0">
+              <a:buNone/>
+            </a:pPr>
+            <a:r>
+              <a:rPr lang="en-US" sz="1250" dirty="0">
+                <a:solidFill>
+                  <a:srgbClr val="7A7F72"/>
+                </a:solidFill>
+                <a:latin typeface="Arial" pitchFamily="34" charset="0"/>
+                <a:ea typeface="Arial" pitchFamily="34" charset="-122"/>
+                <a:cs typeface="Arial" pitchFamily="34" charset="-120"/>
+              </a:rPr>
+              <a:t>Posted and dated on your Component 1 blog. Under Cambridge's own portfolio structure this post is not practice for the portfolio. It is the portfolio.</a:t>
+            </a:r>
+            <a:endParaRPr lang="en-US" sz="1250" dirty="0"/>
+          </a:p>
+        </p:txBody>
+      </p:sp>
+      <p:sp>
+        <p:nvSpPr>
+          <p:cNvPr id="10" name="Shape 8"/>
+          <p:cNvSpPr/>
+          <p:nvPr/>
+        </p:nvSpPr>
+        <p:spPr>
+          <a:xfrm>
+            <a:off x="822960" y="6382512"/>
+            <a:ext cx="10543032" cy="0"/>
           </a:xfrm>
           <a:prstGeom prst="line">
             <a:avLst/>
@@ -2769,490 +3282,77 @@
       </p:sp>
       <p:sp>
         <p:nvSpPr>
-          <p:cNvPr id="9" name="Text 7"/>
-          <p:cNvSpPr/>
-          <p:nvPr/>
-        </p:nvSpPr>
-        <p:spPr>
-          <a:xfrm>
-            <a:off x="822960" y="2999232"/>
-            <a:ext cx="3209544" cy="2103120"/>
-          </a:xfrm>
-          <a:prstGeom prst="rect">
-            <a:avLst/>
-          </a:prstGeom>
-          <a:noFill/>
-          <a:ln/>
-        </p:spPr>
-        <p:txBody>
-          <a:bodyPr wrap="square" lIns="0" tIns="0" rIns="0" bIns="0" rtlCol="0" anchor="t"/>
-          <a:lstStyle/>
-          <a:p>
-            <a:pPr indent="0" marL="0">
-              <a:lnSpc>
-                <a:spcPts val="2100"/>
-              </a:lnSpc>
-              <a:buNone/>
-            </a:pPr>
-            <a:r>
-              <a:rPr lang="en-US" sz="1550" dirty="0">
-                <a:solidFill>
-                  <a:srgbClr val="24313F"/>
+          <p:cNvPr id="11" name="Text 9"/>
+          <p:cNvSpPr/>
+          <p:nvPr/>
+        </p:nvSpPr>
+        <p:spPr>
+          <a:xfrm>
+            <a:off x="822960" y="6419088"/>
+            <a:ext cx="7315200" cy="274320"/>
+          </a:xfrm>
+          <a:prstGeom prst="rect">
+            <a:avLst/>
+          </a:prstGeom>
+          <a:noFill/>
+          <a:ln/>
+        </p:spPr>
+        <p:txBody>
+          <a:bodyPr wrap="square" lIns="0" tIns="0" rIns="0" bIns="0" rtlCol="0" anchor="ctr"/>
+          <a:lstStyle/>
+          <a:p>
+            <a:pPr indent="0" marL="0">
+              <a:buNone/>
+            </a:pPr>
+            <a:r>
+              <a:rPr lang="en-US" sz="900" spc="150" kern="0" dirty="0">
+                <a:solidFill>
+                  <a:srgbClr val="7A7F72"/>
+                </a:solidFill>
+                <a:latin typeface="Arial" pitchFamily="34" charset="0"/>
+                <a:ea typeface="Arial" pitchFamily="34" charset="-122"/>
+                <a:cs typeface="Arial" pitchFamily="34" charset="-120"/>
+              </a:rPr>
+              <a:t>MEDIA STUDIES 9607 · SEMESTER I</a:t>
+            </a:r>
+            <a:endParaRPr lang="en-US" sz="900" dirty="0"/>
+          </a:p>
+        </p:txBody>
+      </p:sp>
+      <p:sp>
+        <p:nvSpPr>
+          <p:cNvPr id="12" name="Text 10"/>
+          <p:cNvSpPr/>
+          <p:nvPr/>
+        </p:nvSpPr>
+        <p:spPr>
+          <a:xfrm>
+            <a:off x="10268712" y="6355080"/>
+            <a:ext cx="1097280" cy="365760"/>
+          </a:xfrm>
+          <a:prstGeom prst="rect">
+            <a:avLst/>
+          </a:prstGeom>
+          <a:noFill/>
+          <a:ln/>
+        </p:spPr>
+        <p:txBody>
+          <a:bodyPr wrap="square" lIns="0" tIns="0" rIns="0" bIns="0" rtlCol="0" anchor="ctr"/>
+          <a:lstStyle/>
+          <a:p>
+            <a:pPr algn="r" indent="0" marL="0">
+              <a:buNone/>
+            </a:pPr>
+            <a:r>
+              <a:rPr lang="en-US" sz="1600" dirty="0">
+                <a:solidFill>
+                  <a:srgbClr val="A3C1AD"/>
                 </a:solidFill>
                 <a:latin typeface="Georgia" pitchFamily="34" charset="0"/>
                 <a:ea typeface="Georgia" pitchFamily="34" charset="-122"/>
                 <a:cs typeface="Georgia" pitchFamily="34" charset="-120"/>
               </a:rPr>
-              <a:t>Tap to lock, then leave it. Autofocus hunts the moment anything crosses the frame, and a hunting lens reads as amateur in one second.</a:t>
-            </a:r>
-            <a:endParaRPr lang="en-US" sz="1550" dirty="0"/>
-          </a:p>
-        </p:txBody>
-      </p:sp>
-      <p:sp>
-        <p:nvSpPr>
-          <p:cNvPr id="10" name="Text 8"/>
-          <p:cNvSpPr/>
-          <p:nvPr/>
-        </p:nvSpPr>
-        <p:spPr>
-          <a:xfrm>
-            <a:off x="4489704" y="1828800"/>
-            <a:ext cx="914400" cy="457200"/>
-          </a:xfrm>
-          <a:prstGeom prst="rect">
-            <a:avLst/>
-          </a:prstGeom>
-          <a:noFill/>
-          <a:ln/>
-        </p:spPr>
-        <p:txBody>
-          <a:bodyPr wrap="square" lIns="0" tIns="0" rIns="0" bIns="0" rtlCol="0" anchor="ctr"/>
-          <a:lstStyle/>
-          <a:p>
-            <a:pPr indent="0" marL="0">
-              <a:buNone/>
-            </a:pPr>
-            <a:r>
-              <a:rPr lang="en-US" sz="2800" dirty="0">
-                <a:solidFill>
-                  <a:srgbClr val="A3C1AD"/>
-                </a:solidFill>
-                <a:latin typeface="Georgia" pitchFamily="34" charset="0"/>
-                <a:ea typeface="Georgia" pitchFamily="34" charset="-122"/>
-                <a:cs typeface="Georgia" pitchFamily="34" charset="-120"/>
-              </a:rPr>
-              <a:t>02</a:t>
-            </a:r>
-            <a:endParaRPr lang="en-US" sz="2800" dirty="0"/>
-          </a:p>
-        </p:txBody>
-      </p:sp>
-      <p:sp>
-        <p:nvSpPr>
-          <p:cNvPr id="11" name="Text 9"/>
-          <p:cNvSpPr/>
-          <p:nvPr/>
-        </p:nvSpPr>
-        <p:spPr>
-          <a:xfrm>
-            <a:off x="4489704" y="2331720"/>
-            <a:ext cx="3209544" cy="475488"/>
-          </a:xfrm>
-          <a:prstGeom prst="rect">
-            <a:avLst/>
-          </a:prstGeom>
-          <a:noFill/>
-          <a:ln/>
-        </p:spPr>
-        <p:txBody>
-          <a:bodyPr wrap="square" lIns="0" tIns="0" rIns="0" bIns="0" rtlCol="0" anchor="ctr"/>
-          <a:lstStyle/>
-          <a:p>
-            <a:pPr indent="0" marL="0">
-              <a:buNone/>
-            </a:pPr>
-            <a:r>
-              <a:rPr lang="en-US" sz="2200" dirty="0">
-                <a:solidFill>
-                  <a:srgbClr val="4A6B5D"/>
-                </a:solidFill>
-                <a:latin typeface="Georgia" pitchFamily="34" charset="0"/>
-                <a:ea typeface="Georgia" pitchFamily="34" charset="-122"/>
-                <a:cs typeface="Georgia" pitchFamily="34" charset="-120"/>
-              </a:rPr>
-              <a:t>Expose for the face</a:t>
-            </a:r>
-            <a:endParaRPr lang="en-US" sz="2200" dirty="0"/>
-          </a:p>
-        </p:txBody>
-      </p:sp>
-      <p:sp>
-        <p:nvSpPr>
-          <p:cNvPr id="12" name="Shape 10"/>
-          <p:cNvSpPr/>
-          <p:nvPr/>
-        </p:nvSpPr>
-        <p:spPr>
-          <a:xfrm>
-            <a:off x="4489704" y="2871216"/>
-            <a:ext cx="3209544" cy="0"/>
-          </a:xfrm>
-          <a:prstGeom prst="line">
-            <a:avLst/>
-          </a:prstGeom>
-          <a:noFill/>
-          <a:ln w="9525">
-            <a:solidFill>
-              <a:srgbClr val="D9D4C4"/>
-            </a:solidFill>
-            <a:prstDash val="solid"/>
-          </a:ln>
-        </p:spPr>
-      </p:sp>
-      <p:sp>
-        <p:nvSpPr>
-          <p:cNvPr id="13" name="Text 11"/>
-          <p:cNvSpPr/>
-          <p:nvPr/>
-        </p:nvSpPr>
-        <p:spPr>
-          <a:xfrm>
-            <a:off x="4489704" y="2999232"/>
-            <a:ext cx="3209544" cy="2103120"/>
-          </a:xfrm>
-          <a:prstGeom prst="rect">
-            <a:avLst/>
-          </a:prstGeom>
-          <a:noFill/>
-          <a:ln/>
-        </p:spPr>
-        <p:txBody>
-          <a:bodyPr wrap="square" lIns="0" tIns="0" rIns="0" bIns="0" rtlCol="0" anchor="t"/>
-          <a:lstStyle/>
-          <a:p>
-            <a:pPr indent="0" marL="0">
-              <a:lnSpc>
-                <a:spcPts val="2100"/>
-              </a:lnSpc>
-              <a:buNone/>
-            </a:pPr>
-            <a:r>
-              <a:rPr lang="en-US" sz="1550" dirty="0">
-                <a:solidFill>
-                  <a:srgbClr val="24313F"/>
-                </a:solidFill>
-                <a:latin typeface="Georgia" pitchFamily="34" charset="0"/>
-                <a:ea typeface="Georgia" pitchFamily="34" charset="-122"/>
-                <a:cs typeface="Georgia" pitchFamily="34" charset="-120"/>
-              </a:rPr>
-              <a:t>Against a bright window the automatic setting protects the window and loses the face. Tap the face, lock, and let the window blow out.</a:t>
-            </a:r>
-            <a:endParaRPr lang="en-US" sz="1550" dirty="0"/>
-          </a:p>
-        </p:txBody>
-      </p:sp>
-      <p:sp>
-        <p:nvSpPr>
-          <p:cNvPr id="14" name="Text 12"/>
-          <p:cNvSpPr/>
-          <p:nvPr/>
-        </p:nvSpPr>
-        <p:spPr>
-          <a:xfrm>
-            <a:off x="8156448" y="1828800"/>
-            <a:ext cx="914400" cy="457200"/>
-          </a:xfrm>
-          <a:prstGeom prst="rect">
-            <a:avLst/>
-          </a:prstGeom>
-          <a:noFill/>
-          <a:ln/>
-        </p:spPr>
-        <p:txBody>
-          <a:bodyPr wrap="square" lIns="0" tIns="0" rIns="0" bIns="0" rtlCol="0" anchor="ctr"/>
-          <a:lstStyle/>
-          <a:p>
-            <a:pPr indent="0" marL="0">
-              <a:buNone/>
-            </a:pPr>
-            <a:r>
-              <a:rPr lang="en-US" sz="2800" dirty="0">
-                <a:solidFill>
-                  <a:srgbClr val="A3C1AD"/>
-                </a:solidFill>
-                <a:latin typeface="Georgia" pitchFamily="34" charset="0"/>
-                <a:ea typeface="Georgia" pitchFamily="34" charset="-122"/>
-                <a:cs typeface="Georgia" pitchFamily="34" charset="-120"/>
-              </a:rPr>
-              <a:t>03</a:t>
-            </a:r>
-            <a:endParaRPr lang="en-US" sz="2800" dirty="0"/>
-          </a:p>
-        </p:txBody>
-      </p:sp>
-      <p:sp>
-        <p:nvSpPr>
-          <p:cNvPr id="15" name="Text 13"/>
-          <p:cNvSpPr/>
-          <p:nvPr/>
-        </p:nvSpPr>
-        <p:spPr>
-          <a:xfrm>
-            <a:off x="8156448" y="2331720"/>
-            <a:ext cx="3209544" cy="475488"/>
-          </a:xfrm>
-          <a:prstGeom prst="rect">
-            <a:avLst/>
-          </a:prstGeom>
-          <a:noFill/>
-          <a:ln/>
-        </p:spPr>
-        <p:txBody>
-          <a:bodyPr wrap="square" lIns="0" tIns="0" rIns="0" bIns="0" rtlCol="0" anchor="ctr"/>
-          <a:lstStyle/>
-          <a:p>
-            <a:pPr indent="0" marL="0">
-              <a:buNone/>
-            </a:pPr>
-            <a:r>
-              <a:rPr lang="en-US" sz="2200" dirty="0">
-                <a:solidFill>
-                  <a:srgbClr val="4A6B5D"/>
-                </a:solidFill>
-                <a:latin typeface="Georgia" pitchFamily="34" charset="0"/>
-                <a:ea typeface="Georgia" pitchFamily="34" charset="-122"/>
-                <a:cs typeface="Georgia" pitchFamily="34" charset="-120"/>
-              </a:rPr>
-              <a:t>Frame to the thirds</a:t>
-            </a:r>
-            <a:endParaRPr lang="en-US" sz="2200" dirty="0"/>
-          </a:p>
-        </p:txBody>
-      </p:sp>
-      <p:sp>
-        <p:nvSpPr>
-          <p:cNvPr id="16" name="Shape 14"/>
-          <p:cNvSpPr/>
-          <p:nvPr/>
-        </p:nvSpPr>
-        <p:spPr>
-          <a:xfrm>
-            <a:off x="8156448" y="2871216"/>
-            <a:ext cx="3209544" cy="0"/>
-          </a:xfrm>
-          <a:prstGeom prst="line">
-            <a:avLst/>
-          </a:prstGeom>
-          <a:noFill/>
-          <a:ln w="9525">
-            <a:solidFill>
-              <a:srgbClr val="D9D4C4"/>
-            </a:solidFill>
-            <a:prstDash val="solid"/>
-          </a:ln>
-        </p:spPr>
-      </p:sp>
-      <p:sp>
-        <p:nvSpPr>
-          <p:cNvPr id="17" name="Text 15"/>
-          <p:cNvSpPr/>
-          <p:nvPr/>
-        </p:nvSpPr>
-        <p:spPr>
-          <a:xfrm>
-            <a:off x="8156448" y="2999232"/>
-            <a:ext cx="3209544" cy="2103120"/>
-          </a:xfrm>
-          <a:prstGeom prst="rect">
-            <a:avLst/>
-          </a:prstGeom>
-          <a:noFill/>
-          <a:ln/>
-        </p:spPr>
-        <p:txBody>
-          <a:bodyPr wrap="square" lIns="0" tIns="0" rIns="0" bIns="0" rtlCol="0" anchor="t"/>
-          <a:lstStyle/>
-          <a:p>
-            <a:pPr indent="0" marL="0">
-              <a:lnSpc>
-                <a:spcPts val="2100"/>
-              </a:lnSpc>
-              <a:buNone/>
-            </a:pPr>
-            <a:r>
-              <a:rPr lang="en-US" sz="1550" dirty="0">
-                <a:solidFill>
-                  <a:srgbClr val="24313F"/>
-                </a:solidFill>
-                <a:latin typeface="Georgia" pitchFamily="34" charset="0"/>
-                <a:ea typeface="Georgia" pitchFamily="34" charset="-122"/>
-                <a:cs typeface="Georgia" pitchFamily="34" charset="-120"/>
-              </a:rPr>
-              <a:t>Centre everything and every shot looks the same. Put the subject on a third and the frame acquires a direction.</a:t>
-            </a:r>
-            <a:endParaRPr lang="en-US" sz="1550" dirty="0"/>
-          </a:p>
-        </p:txBody>
-      </p:sp>
-      <p:sp>
-        <p:nvSpPr>
-          <p:cNvPr id="18" name="Shape 16"/>
-          <p:cNvSpPr/>
-          <p:nvPr/>
-        </p:nvSpPr>
-        <p:spPr>
-          <a:xfrm>
-            <a:off x="822960" y="5349240"/>
-            <a:ext cx="914400" cy="0"/>
-          </a:xfrm>
-          <a:prstGeom prst="line">
-            <a:avLst/>
-          </a:prstGeom>
-          <a:noFill/>
-          <a:ln w="31750">
-            <a:solidFill>
-              <a:srgbClr val="8C3A38"/>
-            </a:solidFill>
-            <a:prstDash val="solid"/>
-          </a:ln>
-        </p:spPr>
-      </p:sp>
-      <p:sp>
-        <p:nvSpPr>
-          <p:cNvPr id="19" name="Text 17"/>
-          <p:cNvSpPr/>
-          <p:nvPr/>
-        </p:nvSpPr>
-        <p:spPr>
-          <a:xfrm>
-            <a:off x="822960" y="5532120"/>
-            <a:ext cx="10241280" cy="548640"/>
-          </a:xfrm>
-          <a:prstGeom prst="rect">
-            <a:avLst/>
-          </a:prstGeom>
-          <a:noFill/>
-          <a:ln/>
-        </p:spPr>
-        <p:txBody>
-          <a:bodyPr wrap="square" lIns="0" tIns="0" rIns="0" bIns="0" rtlCol="0" anchor="ctr"/>
-          <a:lstStyle/>
-          <a:p>
-            <a:pPr indent="0" marL="0">
-              <a:buNone/>
-            </a:pPr>
-            <a:r>
-              <a:rPr lang="en-US" sz="1250" i="1" dirty="0">
-                <a:solidFill>
-                  <a:srgbClr val="7A7F72"/>
-                </a:solidFill>
-                <a:latin typeface="Arial" pitchFamily="34" charset="0"/>
-                <a:ea typeface="Arial" pitchFamily="34" charset="-122"/>
-                <a:cs typeface="Arial" pitchFamily="34" charset="-120"/>
-              </a:rPr>
-              <a:t>Carries forward: the Component 3 major video task in Grade 12 is shot on exactly this vocabulary.</a:t>
-            </a:r>
-            <a:endParaRPr lang="en-US" sz="1250" dirty="0"/>
-          </a:p>
-        </p:txBody>
-      </p:sp>
-      <p:sp>
-        <p:nvSpPr>
-          <p:cNvPr id="20" name="Shape 18"/>
-          <p:cNvSpPr/>
-          <p:nvPr/>
-        </p:nvSpPr>
-        <p:spPr>
-          <a:xfrm>
-            <a:off x="822960" y="6382512"/>
-            <a:ext cx="10543032" cy="0"/>
-          </a:xfrm>
-          <a:prstGeom prst="line">
-            <a:avLst/>
-          </a:prstGeom>
-          <a:noFill/>
-          <a:ln w="9525">
-            <a:solidFill>
-              <a:srgbClr val="D9D4C4"/>
-            </a:solidFill>
-            <a:prstDash val="solid"/>
-          </a:ln>
-        </p:spPr>
-      </p:sp>
-      <p:sp>
-        <p:nvSpPr>
-          <p:cNvPr id="21" name="Text 19"/>
-          <p:cNvSpPr/>
-          <p:nvPr/>
-        </p:nvSpPr>
-        <p:spPr>
-          <a:xfrm>
-            <a:off x="822960" y="6419088"/>
-            <a:ext cx="7315200" cy="274320"/>
-          </a:xfrm>
-          <a:prstGeom prst="rect">
-            <a:avLst/>
-          </a:prstGeom>
-          <a:noFill/>
-          <a:ln/>
-        </p:spPr>
-        <p:txBody>
-          <a:bodyPr wrap="square" lIns="0" tIns="0" rIns="0" bIns="0" rtlCol="0" anchor="ctr"/>
-          <a:lstStyle/>
-          <a:p>
-            <a:pPr indent="0" marL="0">
-              <a:buNone/>
-            </a:pPr>
-            <a:r>
-              <a:rPr lang="en-US" sz="900" spc="150" kern="0" dirty="0">
-                <a:solidFill>
-                  <a:srgbClr val="7A7F72"/>
-                </a:solidFill>
-                <a:latin typeface="Arial" pitchFamily="34" charset="0"/>
-                <a:ea typeface="Arial" pitchFamily="34" charset="-122"/>
-                <a:cs typeface="Arial" pitchFamily="34" charset="-120"/>
-              </a:rPr>
-              <a:t>MEDIA STUDIES 9607 · SEMESTER I</a:t>
-            </a:r>
-            <a:endParaRPr lang="en-US" sz="900" dirty="0"/>
-          </a:p>
-        </p:txBody>
-      </p:sp>
-      <p:sp>
-        <p:nvSpPr>
-          <p:cNvPr id="22" name="Text 20"/>
-          <p:cNvSpPr/>
-          <p:nvPr/>
-        </p:nvSpPr>
-        <p:spPr>
-          <a:xfrm>
-            <a:off x="10268712" y="6355080"/>
-            <a:ext cx="1097280" cy="365760"/>
-          </a:xfrm>
-          <a:prstGeom prst="rect">
-            <a:avLst/>
-          </a:prstGeom>
-          <a:noFill/>
-          <a:ln/>
-        </p:spPr>
-        <p:txBody>
-          <a:bodyPr wrap="square" lIns="0" tIns="0" rIns="0" bIns="0" rtlCol="0" anchor="ctr"/>
-          <a:lstStyle/>
-          <a:p>
-            <a:pPr algn="r" indent="0" marL="0">
-              <a:buNone/>
-            </a:pPr>
-            <a:r>
-              <a:rPr lang="en-US" sz="1600" dirty="0">
-                <a:solidFill>
-                  <a:srgbClr val="A3C1AD"/>
-                </a:solidFill>
-                <a:latin typeface="Georgia" pitchFamily="34" charset="0"/>
-                <a:ea typeface="Georgia" pitchFamily="34" charset="-122"/>
-                <a:cs typeface="Georgia" pitchFamily="34" charset="-120"/>
-              </a:rPr>
-              <a:t>06</a:t>
+              <a:t>07</a:t>
             </a:r>
             <a:endParaRPr lang="en-US" sz="1600" dirty="0"/>
           </a:p>
@@ -3266,9 +3366,773 @@
 </p:sld>
 </file>
 
-<file path=ppt/slides/slide12.xml><?xml version="1.0" encoding="utf-8"?>
+<file path=ppt/slides/slide13.xml><?xml version="1.0" encoding="utf-8"?>
 <p:sld xmlns:a="http://schemas.openxmlformats.org/drawingml/2006/main" xmlns:r="http://schemas.openxmlformats.org/officeDocument/2006/relationships" xmlns:p="http://schemas.openxmlformats.org/presentationml/2006/main">
-  <p:cSld name="Slide 12">
+  <p:cSld name="Slide 13">
+    <p:bg>
+      <p:bgPr>
+        <a:solidFill>
+          <a:srgbClr val="FAF8F1"/>
+        </a:solidFill>
+      </p:bgPr>
+    </p:bg>
+    <p:spTree>
+      <p:nvGrpSpPr>
+        <p:cNvPr id="1" name=""/>
+        <p:cNvGrpSpPr/>
+        <p:nvPr/>
+      </p:nvGrpSpPr>
+      <p:grpSpPr>
+        <a:xfrm>
+          <a:off x="0" y="0"/>
+          <a:ext cx="0" cy="0"/>
+          <a:chOff x="0" y="0"/>
+          <a:chExt cx="0" cy="0"/>
+        </a:xfrm>
+      </p:grpSpPr>
+      <p:sp>
+        <p:nvSpPr>
+          <p:cNvPr id="2" name="Text 0"/>
+          <p:cNvSpPr/>
+          <p:nvPr/>
+        </p:nvSpPr>
+        <p:spPr>
+          <a:xfrm>
+            <a:off x="822960" y="457200"/>
+            <a:ext cx="6400800" cy="274320"/>
+          </a:xfrm>
+          <a:prstGeom prst="rect">
+            <a:avLst/>
+          </a:prstGeom>
+          <a:noFill/>
+          <a:ln/>
+        </p:spPr>
+        <p:txBody>
+          <a:bodyPr wrap="square" lIns="0" tIns="0" rIns="0" bIns="0" rtlCol="0" anchor="ctr"/>
+          <a:lstStyle/>
+          <a:p>
+            <a:pPr algn="l" indent="0" marL="0">
+              <a:buNone/>
+            </a:pPr>
+            <a:r>
+              <a:rPr lang="en-US" sz="1100" b="1" spc="250" kern="0" dirty="0">
+                <a:solidFill>
+                  <a:srgbClr val="4A6B5D"/>
+                </a:solidFill>
+                <a:latin typeface="Arial" pitchFamily="34" charset="0"/>
+                <a:ea typeface="Arial" pitchFamily="34" charset="-122"/>
+                <a:cs typeface="Arial" pitchFamily="34" charset="-120"/>
+              </a:rPr>
+              <a:t>THREE CONTROLS, NON-NEGOTIABLE</a:t>
+            </a:r>
+            <a:endParaRPr lang="en-US" sz="1100" dirty="0"/>
+          </a:p>
+        </p:txBody>
+      </p:sp>
+      <p:sp>
+        <p:nvSpPr>
+          <p:cNvPr id="3" name="Text 1"/>
+          <p:cNvSpPr/>
+          <p:nvPr/>
+        </p:nvSpPr>
+        <p:spPr>
+          <a:xfrm>
+            <a:off x="6793992" y="457200"/>
+            <a:ext cx="4572000" cy="274320"/>
+          </a:xfrm>
+          <a:prstGeom prst="rect">
+            <a:avLst/>
+          </a:prstGeom>
+          <a:noFill/>
+          <a:ln/>
+        </p:spPr>
+        <p:txBody>
+          <a:bodyPr wrap="square" lIns="0" tIns="0" rIns="0" bIns="0" rtlCol="0" anchor="ctr"/>
+          <a:lstStyle/>
+          <a:p>
+            <a:pPr algn="r" indent="0" marL="0">
+              <a:buNone/>
+            </a:pPr>
+            <a:r>
+              <a:rPr lang="en-US" sz="1100" b="1" spc="250" kern="0" dirty="0">
+                <a:solidFill>
+                  <a:srgbClr val="7A7F72"/>
+                </a:solidFill>
+                <a:latin typeface="Arial" pitchFamily="34" charset="0"/>
+                <a:ea typeface="Arial" pitchFamily="34" charset="-122"/>
+                <a:cs typeface="Arial" pitchFamily="34" charset="-120"/>
+              </a:rPr>
+              <a:t>EACH ONE IS A MARKING POINT</a:t>
+            </a:r>
+            <a:endParaRPr lang="en-US" sz="1100" dirty="0"/>
+          </a:p>
+        </p:txBody>
+      </p:sp>
+      <p:sp>
+        <p:nvSpPr>
+          <p:cNvPr id="4" name="Shape 2"/>
+          <p:cNvSpPr/>
+          <p:nvPr/>
+        </p:nvSpPr>
+        <p:spPr>
+          <a:xfrm>
+            <a:off x="822960" y="786384"/>
+            <a:ext cx="10543032" cy="0"/>
+          </a:xfrm>
+          <a:prstGeom prst="line">
+            <a:avLst/>
+          </a:prstGeom>
+          <a:noFill/>
+          <a:ln w="9525">
+            <a:solidFill>
+              <a:srgbClr val="D9D4C4"/>
+            </a:solidFill>
+            <a:prstDash val="solid"/>
+          </a:ln>
+        </p:spPr>
+      </p:sp>
+      <p:sp>
+        <p:nvSpPr>
+          <p:cNvPr id="5" name="Text 3"/>
+          <p:cNvSpPr/>
+          <p:nvPr/>
+        </p:nvSpPr>
+        <p:spPr>
+          <a:xfrm>
+            <a:off x="822960" y="932688"/>
+            <a:ext cx="10543032" cy="640080"/>
+          </a:xfrm>
+          <a:prstGeom prst="rect">
+            <a:avLst/>
+          </a:prstGeom>
+          <a:noFill/>
+          <a:ln/>
+        </p:spPr>
+        <p:txBody>
+          <a:bodyPr wrap="square" lIns="0" tIns="0" rIns="0" bIns="0" rtlCol="0" anchor="ctr"/>
+          <a:lstStyle/>
+          <a:p>
+            <a:pPr indent="0" marL="0">
+              <a:buNone/>
+            </a:pPr>
+            <a:r>
+              <a:rPr lang="en-US" sz="3200" dirty="0">
+                <a:solidFill>
+                  <a:srgbClr val="24313F"/>
+                </a:solidFill>
+                <a:latin typeface="Georgia" pitchFamily="34" charset="0"/>
+                <a:ea typeface="Georgia" pitchFamily="34" charset="-122"/>
+                <a:cs typeface="Georgia" pitchFamily="34" charset="-120"/>
+              </a:rPr>
+              <a:t>What actually kills student footage</a:t>
+            </a:r>
+            <a:endParaRPr lang="en-US" sz="3200" dirty="0"/>
+          </a:p>
+        </p:txBody>
+      </p:sp>
+      <p:sp>
+        <p:nvSpPr>
+          <p:cNvPr id="6" name="Text 4"/>
+          <p:cNvSpPr/>
+          <p:nvPr/>
+        </p:nvSpPr>
+        <p:spPr>
+          <a:xfrm>
+            <a:off x="822960" y="1828800"/>
+            <a:ext cx="914400" cy="457200"/>
+          </a:xfrm>
+          <a:prstGeom prst="rect">
+            <a:avLst/>
+          </a:prstGeom>
+          <a:noFill/>
+          <a:ln/>
+        </p:spPr>
+        <p:txBody>
+          <a:bodyPr wrap="square" lIns="0" tIns="0" rIns="0" bIns="0" rtlCol="0" anchor="ctr"/>
+          <a:lstStyle/>
+          <a:p>
+            <a:pPr indent="0" marL="0">
+              <a:buNone/>
+            </a:pPr>
+            <a:r>
+              <a:rPr lang="en-US" sz="2800" dirty="0">
+                <a:solidFill>
+                  <a:srgbClr val="A3C1AD"/>
+                </a:solidFill>
+                <a:latin typeface="Georgia" pitchFamily="34" charset="0"/>
+                <a:ea typeface="Georgia" pitchFamily="34" charset="-122"/>
+                <a:cs typeface="Georgia" pitchFamily="34" charset="-120"/>
+              </a:rPr>
+              <a:t>01</a:t>
+            </a:r>
+            <a:endParaRPr lang="en-US" sz="2800" dirty="0"/>
+          </a:p>
+        </p:txBody>
+      </p:sp>
+      <p:sp>
+        <p:nvSpPr>
+          <p:cNvPr id="7" name="Text 5"/>
+          <p:cNvSpPr/>
+          <p:nvPr/>
+        </p:nvSpPr>
+        <p:spPr>
+          <a:xfrm>
+            <a:off x="822960" y="2331720"/>
+            <a:ext cx="3209544" cy="475488"/>
+          </a:xfrm>
+          <a:prstGeom prst="rect">
+            <a:avLst/>
+          </a:prstGeom>
+          <a:noFill/>
+          <a:ln/>
+        </p:spPr>
+        <p:txBody>
+          <a:bodyPr wrap="square" lIns="0" tIns="0" rIns="0" bIns="0" rtlCol="0" anchor="ctr"/>
+          <a:lstStyle/>
+          <a:p>
+            <a:pPr indent="0" marL="0">
+              <a:buNone/>
+            </a:pPr>
+            <a:r>
+              <a:rPr lang="en-US" sz="2200" dirty="0">
+                <a:solidFill>
+                  <a:srgbClr val="4A6B5D"/>
+                </a:solidFill>
+                <a:latin typeface="Georgia" pitchFamily="34" charset="0"/>
+                <a:ea typeface="Georgia" pitchFamily="34" charset="-122"/>
+                <a:cs typeface="Georgia" pitchFamily="34" charset="-120"/>
+              </a:rPr>
+              <a:t>Hold focus</a:t>
+            </a:r>
+            <a:endParaRPr lang="en-US" sz="2200" dirty="0"/>
+          </a:p>
+        </p:txBody>
+      </p:sp>
+      <p:sp>
+        <p:nvSpPr>
+          <p:cNvPr id="8" name="Shape 6"/>
+          <p:cNvSpPr/>
+          <p:nvPr/>
+        </p:nvSpPr>
+        <p:spPr>
+          <a:xfrm>
+            <a:off x="822960" y="2871216"/>
+            <a:ext cx="3209544" cy="0"/>
+          </a:xfrm>
+          <a:prstGeom prst="line">
+            <a:avLst/>
+          </a:prstGeom>
+          <a:noFill/>
+          <a:ln w="9525">
+            <a:solidFill>
+              <a:srgbClr val="D9D4C4"/>
+            </a:solidFill>
+            <a:prstDash val="solid"/>
+          </a:ln>
+        </p:spPr>
+      </p:sp>
+      <p:sp>
+        <p:nvSpPr>
+          <p:cNvPr id="9" name="Text 7"/>
+          <p:cNvSpPr/>
+          <p:nvPr/>
+        </p:nvSpPr>
+        <p:spPr>
+          <a:xfrm>
+            <a:off x="822960" y="2999232"/>
+            <a:ext cx="3209544" cy="2103120"/>
+          </a:xfrm>
+          <a:prstGeom prst="rect">
+            <a:avLst/>
+          </a:prstGeom>
+          <a:noFill/>
+          <a:ln/>
+        </p:spPr>
+        <p:txBody>
+          <a:bodyPr wrap="square" lIns="0" tIns="0" rIns="0" bIns="0" rtlCol="0" anchor="t"/>
+          <a:lstStyle/>
+          <a:p>
+            <a:pPr indent="0" marL="0">
+              <a:lnSpc>
+                <a:spcPts val="2100"/>
+              </a:lnSpc>
+              <a:buNone/>
+            </a:pPr>
+            <a:r>
+              <a:rPr lang="en-US" sz="1550" dirty="0">
+                <a:solidFill>
+                  <a:srgbClr val="24313F"/>
+                </a:solidFill>
+                <a:latin typeface="Georgia" pitchFamily="34" charset="0"/>
+                <a:ea typeface="Georgia" pitchFamily="34" charset="-122"/>
+                <a:cs typeface="Georgia" pitchFamily="34" charset="-120"/>
+              </a:rPr>
+              <a:t>Tap to lock, then leave it. Autofocus hunts the moment anything crosses the frame, and a hunting lens reads as amateur in one second.</a:t>
+            </a:r>
+            <a:endParaRPr lang="en-US" sz="1550" dirty="0"/>
+          </a:p>
+        </p:txBody>
+      </p:sp>
+      <p:sp>
+        <p:nvSpPr>
+          <p:cNvPr id="10" name="Text 8"/>
+          <p:cNvSpPr/>
+          <p:nvPr/>
+        </p:nvSpPr>
+        <p:spPr>
+          <a:xfrm>
+            <a:off x="4489704" y="1828800"/>
+            <a:ext cx="914400" cy="457200"/>
+          </a:xfrm>
+          <a:prstGeom prst="rect">
+            <a:avLst/>
+          </a:prstGeom>
+          <a:noFill/>
+          <a:ln/>
+        </p:spPr>
+        <p:txBody>
+          <a:bodyPr wrap="square" lIns="0" tIns="0" rIns="0" bIns="0" rtlCol="0" anchor="ctr"/>
+          <a:lstStyle/>
+          <a:p>
+            <a:pPr indent="0" marL="0">
+              <a:buNone/>
+            </a:pPr>
+            <a:r>
+              <a:rPr lang="en-US" sz="2800" dirty="0">
+                <a:solidFill>
+                  <a:srgbClr val="A3C1AD"/>
+                </a:solidFill>
+                <a:latin typeface="Georgia" pitchFamily="34" charset="0"/>
+                <a:ea typeface="Georgia" pitchFamily="34" charset="-122"/>
+                <a:cs typeface="Georgia" pitchFamily="34" charset="-120"/>
+              </a:rPr>
+              <a:t>02</a:t>
+            </a:r>
+            <a:endParaRPr lang="en-US" sz="2800" dirty="0"/>
+          </a:p>
+        </p:txBody>
+      </p:sp>
+      <p:sp>
+        <p:nvSpPr>
+          <p:cNvPr id="11" name="Text 9"/>
+          <p:cNvSpPr/>
+          <p:nvPr/>
+        </p:nvSpPr>
+        <p:spPr>
+          <a:xfrm>
+            <a:off x="4489704" y="2331720"/>
+            <a:ext cx="3209544" cy="475488"/>
+          </a:xfrm>
+          <a:prstGeom prst="rect">
+            <a:avLst/>
+          </a:prstGeom>
+          <a:noFill/>
+          <a:ln/>
+        </p:spPr>
+        <p:txBody>
+          <a:bodyPr wrap="square" lIns="0" tIns="0" rIns="0" bIns="0" rtlCol="0" anchor="ctr"/>
+          <a:lstStyle/>
+          <a:p>
+            <a:pPr indent="0" marL="0">
+              <a:buNone/>
+            </a:pPr>
+            <a:r>
+              <a:rPr lang="en-US" sz="2200" dirty="0">
+                <a:solidFill>
+                  <a:srgbClr val="4A6B5D"/>
+                </a:solidFill>
+                <a:latin typeface="Georgia" pitchFamily="34" charset="0"/>
+                <a:ea typeface="Georgia" pitchFamily="34" charset="-122"/>
+                <a:cs typeface="Georgia" pitchFamily="34" charset="-120"/>
+              </a:rPr>
+              <a:t>Expose for the face</a:t>
+            </a:r>
+            <a:endParaRPr lang="en-US" sz="2200" dirty="0"/>
+          </a:p>
+        </p:txBody>
+      </p:sp>
+      <p:sp>
+        <p:nvSpPr>
+          <p:cNvPr id="12" name="Shape 10"/>
+          <p:cNvSpPr/>
+          <p:nvPr/>
+        </p:nvSpPr>
+        <p:spPr>
+          <a:xfrm>
+            <a:off x="4489704" y="2871216"/>
+            <a:ext cx="3209544" cy="0"/>
+          </a:xfrm>
+          <a:prstGeom prst="line">
+            <a:avLst/>
+          </a:prstGeom>
+          <a:noFill/>
+          <a:ln w="9525">
+            <a:solidFill>
+              <a:srgbClr val="D9D4C4"/>
+            </a:solidFill>
+            <a:prstDash val="solid"/>
+          </a:ln>
+        </p:spPr>
+      </p:sp>
+      <p:sp>
+        <p:nvSpPr>
+          <p:cNvPr id="13" name="Text 11"/>
+          <p:cNvSpPr/>
+          <p:nvPr/>
+        </p:nvSpPr>
+        <p:spPr>
+          <a:xfrm>
+            <a:off x="4489704" y="2999232"/>
+            <a:ext cx="3209544" cy="2103120"/>
+          </a:xfrm>
+          <a:prstGeom prst="rect">
+            <a:avLst/>
+          </a:prstGeom>
+          <a:noFill/>
+          <a:ln/>
+        </p:spPr>
+        <p:txBody>
+          <a:bodyPr wrap="square" lIns="0" tIns="0" rIns="0" bIns="0" rtlCol="0" anchor="t"/>
+          <a:lstStyle/>
+          <a:p>
+            <a:pPr indent="0" marL="0">
+              <a:lnSpc>
+                <a:spcPts val="2100"/>
+              </a:lnSpc>
+              <a:buNone/>
+            </a:pPr>
+            <a:r>
+              <a:rPr lang="en-US" sz="1550" dirty="0">
+                <a:solidFill>
+                  <a:srgbClr val="24313F"/>
+                </a:solidFill>
+                <a:latin typeface="Georgia" pitchFamily="34" charset="0"/>
+                <a:ea typeface="Georgia" pitchFamily="34" charset="-122"/>
+                <a:cs typeface="Georgia" pitchFamily="34" charset="-120"/>
+              </a:rPr>
+              <a:t>Against a bright window the automatic setting protects the window and loses the face. Tap the face, lock, and let the window blow out.</a:t>
+            </a:r>
+            <a:endParaRPr lang="en-US" sz="1550" dirty="0"/>
+          </a:p>
+        </p:txBody>
+      </p:sp>
+      <p:sp>
+        <p:nvSpPr>
+          <p:cNvPr id="14" name="Text 12"/>
+          <p:cNvSpPr/>
+          <p:nvPr/>
+        </p:nvSpPr>
+        <p:spPr>
+          <a:xfrm>
+            <a:off x="8156448" y="1828800"/>
+            <a:ext cx="914400" cy="457200"/>
+          </a:xfrm>
+          <a:prstGeom prst="rect">
+            <a:avLst/>
+          </a:prstGeom>
+          <a:noFill/>
+          <a:ln/>
+        </p:spPr>
+        <p:txBody>
+          <a:bodyPr wrap="square" lIns="0" tIns="0" rIns="0" bIns="0" rtlCol="0" anchor="ctr"/>
+          <a:lstStyle/>
+          <a:p>
+            <a:pPr indent="0" marL="0">
+              <a:buNone/>
+            </a:pPr>
+            <a:r>
+              <a:rPr lang="en-US" sz="2800" dirty="0">
+                <a:solidFill>
+                  <a:srgbClr val="A3C1AD"/>
+                </a:solidFill>
+                <a:latin typeface="Georgia" pitchFamily="34" charset="0"/>
+                <a:ea typeface="Georgia" pitchFamily="34" charset="-122"/>
+                <a:cs typeface="Georgia" pitchFamily="34" charset="-120"/>
+              </a:rPr>
+              <a:t>03</a:t>
+            </a:r>
+            <a:endParaRPr lang="en-US" sz="2800" dirty="0"/>
+          </a:p>
+        </p:txBody>
+      </p:sp>
+      <p:sp>
+        <p:nvSpPr>
+          <p:cNvPr id="15" name="Text 13"/>
+          <p:cNvSpPr/>
+          <p:nvPr/>
+        </p:nvSpPr>
+        <p:spPr>
+          <a:xfrm>
+            <a:off x="8156448" y="2331720"/>
+            <a:ext cx="3209544" cy="475488"/>
+          </a:xfrm>
+          <a:prstGeom prst="rect">
+            <a:avLst/>
+          </a:prstGeom>
+          <a:noFill/>
+          <a:ln/>
+        </p:spPr>
+        <p:txBody>
+          <a:bodyPr wrap="square" lIns="0" tIns="0" rIns="0" bIns="0" rtlCol="0" anchor="ctr"/>
+          <a:lstStyle/>
+          <a:p>
+            <a:pPr indent="0" marL="0">
+              <a:buNone/>
+            </a:pPr>
+            <a:r>
+              <a:rPr lang="en-US" sz="2200" dirty="0">
+                <a:solidFill>
+                  <a:srgbClr val="4A6B5D"/>
+                </a:solidFill>
+                <a:latin typeface="Georgia" pitchFamily="34" charset="0"/>
+                <a:ea typeface="Georgia" pitchFamily="34" charset="-122"/>
+                <a:cs typeface="Georgia" pitchFamily="34" charset="-120"/>
+              </a:rPr>
+              <a:t>Frame to the thirds</a:t>
+            </a:r>
+            <a:endParaRPr lang="en-US" sz="2200" dirty="0"/>
+          </a:p>
+        </p:txBody>
+      </p:sp>
+      <p:sp>
+        <p:nvSpPr>
+          <p:cNvPr id="16" name="Shape 14"/>
+          <p:cNvSpPr/>
+          <p:nvPr/>
+        </p:nvSpPr>
+        <p:spPr>
+          <a:xfrm>
+            <a:off x="8156448" y="2871216"/>
+            <a:ext cx="3209544" cy="0"/>
+          </a:xfrm>
+          <a:prstGeom prst="line">
+            <a:avLst/>
+          </a:prstGeom>
+          <a:noFill/>
+          <a:ln w="9525">
+            <a:solidFill>
+              <a:srgbClr val="D9D4C4"/>
+            </a:solidFill>
+            <a:prstDash val="solid"/>
+          </a:ln>
+        </p:spPr>
+      </p:sp>
+      <p:sp>
+        <p:nvSpPr>
+          <p:cNvPr id="17" name="Text 15"/>
+          <p:cNvSpPr/>
+          <p:nvPr/>
+        </p:nvSpPr>
+        <p:spPr>
+          <a:xfrm>
+            <a:off x="8156448" y="2999232"/>
+            <a:ext cx="3209544" cy="2103120"/>
+          </a:xfrm>
+          <a:prstGeom prst="rect">
+            <a:avLst/>
+          </a:prstGeom>
+          <a:noFill/>
+          <a:ln/>
+        </p:spPr>
+        <p:txBody>
+          <a:bodyPr wrap="square" lIns="0" tIns="0" rIns="0" bIns="0" rtlCol="0" anchor="t"/>
+          <a:lstStyle/>
+          <a:p>
+            <a:pPr indent="0" marL="0">
+              <a:lnSpc>
+                <a:spcPts val="2100"/>
+              </a:lnSpc>
+              <a:buNone/>
+            </a:pPr>
+            <a:r>
+              <a:rPr lang="en-US" sz="1550" dirty="0">
+                <a:solidFill>
+                  <a:srgbClr val="24313F"/>
+                </a:solidFill>
+                <a:latin typeface="Georgia" pitchFamily="34" charset="0"/>
+                <a:ea typeface="Georgia" pitchFamily="34" charset="-122"/>
+                <a:cs typeface="Georgia" pitchFamily="34" charset="-120"/>
+              </a:rPr>
+              <a:t>Centre everything and every shot looks the same. Put the subject on a third and the frame acquires a direction.</a:t>
+            </a:r>
+            <a:endParaRPr lang="en-US" sz="1550" dirty="0"/>
+          </a:p>
+        </p:txBody>
+      </p:sp>
+      <p:sp>
+        <p:nvSpPr>
+          <p:cNvPr id="18" name="Shape 16"/>
+          <p:cNvSpPr/>
+          <p:nvPr/>
+        </p:nvSpPr>
+        <p:spPr>
+          <a:xfrm>
+            <a:off x="822960" y="5349240"/>
+            <a:ext cx="914400" cy="0"/>
+          </a:xfrm>
+          <a:prstGeom prst="line">
+            <a:avLst/>
+          </a:prstGeom>
+          <a:noFill/>
+          <a:ln w="31750">
+            <a:solidFill>
+              <a:srgbClr val="8C3A38"/>
+            </a:solidFill>
+            <a:prstDash val="solid"/>
+          </a:ln>
+        </p:spPr>
+      </p:sp>
+      <p:sp>
+        <p:nvSpPr>
+          <p:cNvPr id="19" name="Text 17"/>
+          <p:cNvSpPr/>
+          <p:nvPr/>
+        </p:nvSpPr>
+        <p:spPr>
+          <a:xfrm>
+            <a:off x="822960" y="5532120"/>
+            <a:ext cx="10241280" cy="548640"/>
+          </a:xfrm>
+          <a:prstGeom prst="rect">
+            <a:avLst/>
+          </a:prstGeom>
+          <a:noFill/>
+          <a:ln/>
+        </p:spPr>
+        <p:txBody>
+          <a:bodyPr wrap="square" lIns="0" tIns="0" rIns="0" bIns="0" rtlCol="0" anchor="ctr"/>
+          <a:lstStyle/>
+          <a:p>
+            <a:pPr indent="0" marL="0">
+              <a:buNone/>
+            </a:pPr>
+            <a:r>
+              <a:rPr lang="en-US" sz="1250" i="1" dirty="0">
+                <a:solidFill>
+                  <a:srgbClr val="7A7F72"/>
+                </a:solidFill>
+                <a:latin typeface="Arial" pitchFamily="34" charset="0"/>
+                <a:ea typeface="Arial" pitchFamily="34" charset="-122"/>
+                <a:cs typeface="Arial" pitchFamily="34" charset="-120"/>
+              </a:rPr>
+              <a:t>Carries forward: the Component 3 major video task in Grade 12 is shot on exactly this vocabulary.</a:t>
+            </a:r>
+            <a:endParaRPr lang="en-US" sz="1250" dirty="0"/>
+          </a:p>
+        </p:txBody>
+      </p:sp>
+      <p:sp>
+        <p:nvSpPr>
+          <p:cNvPr id="20" name="Shape 18"/>
+          <p:cNvSpPr/>
+          <p:nvPr/>
+        </p:nvSpPr>
+        <p:spPr>
+          <a:xfrm>
+            <a:off x="822960" y="6382512"/>
+            <a:ext cx="10543032" cy="0"/>
+          </a:xfrm>
+          <a:prstGeom prst="line">
+            <a:avLst/>
+          </a:prstGeom>
+          <a:noFill/>
+          <a:ln w="9525">
+            <a:solidFill>
+              <a:srgbClr val="D9D4C4"/>
+            </a:solidFill>
+            <a:prstDash val="solid"/>
+          </a:ln>
+        </p:spPr>
+      </p:sp>
+      <p:sp>
+        <p:nvSpPr>
+          <p:cNvPr id="21" name="Text 19"/>
+          <p:cNvSpPr/>
+          <p:nvPr/>
+        </p:nvSpPr>
+        <p:spPr>
+          <a:xfrm>
+            <a:off x="822960" y="6419088"/>
+            <a:ext cx="7315200" cy="274320"/>
+          </a:xfrm>
+          <a:prstGeom prst="rect">
+            <a:avLst/>
+          </a:prstGeom>
+          <a:noFill/>
+          <a:ln/>
+        </p:spPr>
+        <p:txBody>
+          <a:bodyPr wrap="square" lIns="0" tIns="0" rIns="0" bIns="0" rtlCol="0" anchor="ctr"/>
+          <a:lstStyle/>
+          <a:p>
+            <a:pPr indent="0" marL="0">
+              <a:buNone/>
+            </a:pPr>
+            <a:r>
+              <a:rPr lang="en-US" sz="900" spc="150" kern="0" dirty="0">
+                <a:solidFill>
+                  <a:srgbClr val="7A7F72"/>
+                </a:solidFill>
+                <a:latin typeface="Arial" pitchFamily="34" charset="0"/>
+                <a:ea typeface="Arial" pitchFamily="34" charset="-122"/>
+                <a:cs typeface="Arial" pitchFamily="34" charset="-120"/>
+              </a:rPr>
+              <a:t>MEDIA STUDIES 9607 · SEMESTER I</a:t>
+            </a:r>
+            <a:endParaRPr lang="en-US" sz="900" dirty="0"/>
+          </a:p>
+        </p:txBody>
+      </p:sp>
+      <p:sp>
+        <p:nvSpPr>
+          <p:cNvPr id="22" name="Text 20"/>
+          <p:cNvSpPr/>
+          <p:nvPr/>
+        </p:nvSpPr>
+        <p:spPr>
+          <a:xfrm>
+            <a:off x="10268712" y="6355080"/>
+            <a:ext cx="1097280" cy="365760"/>
+          </a:xfrm>
+          <a:prstGeom prst="rect">
+            <a:avLst/>
+          </a:prstGeom>
+          <a:noFill/>
+          <a:ln/>
+        </p:spPr>
+        <p:txBody>
+          <a:bodyPr wrap="square" lIns="0" tIns="0" rIns="0" bIns="0" rtlCol="0" anchor="ctr"/>
+          <a:lstStyle/>
+          <a:p>
+            <a:pPr algn="r" indent="0" marL="0">
+              <a:buNone/>
+            </a:pPr>
+            <a:r>
+              <a:rPr lang="en-US" sz="1600" dirty="0">
+                <a:solidFill>
+                  <a:srgbClr val="A3C1AD"/>
+                </a:solidFill>
+                <a:latin typeface="Georgia" pitchFamily="34" charset="0"/>
+                <a:ea typeface="Georgia" pitchFamily="34" charset="-122"/>
+                <a:cs typeface="Georgia" pitchFamily="34" charset="-120"/>
+              </a:rPr>
+              <a:t>08</a:t>
+            </a:r>
+            <a:endParaRPr lang="en-US" sz="1600" dirty="0"/>
+          </a:p>
+        </p:txBody>
+      </p:sp>
+    </p:spTree>
+  </p:cSld>
+  <p:clrMapOvr>
+    <a:masterClrMapping/>
+  </p:clrMapOvr>
+</p:sld>
+</file>
+
+<file path=ppt/slides/slide14.xml><?xml version="1.0" encoding="utf-8"?>
+<p:sld xmlns:a="http://schemas.openxmlformats.org/drawingml/2006/main" xmlns:r="http://schemas.openxmlformats.org/officeDocument/2006/relationships" xmlns:p="http://schemas.openxmlformats.org/presentationml/2006/main">
+  <p:cSld name="Slide 14">
     <p:bg>
       <p:bgPr>
         <a:solidFill>
@@ -3531,7 +4395,7 @@
                 <a:ea typeface="Georgia" pitchFamily="34" charset="-122"/>
                 <a:cs typeface="Georgia" pitchFamily="34" charset="-120"/>
               </a:rPr>
-              <a:t>07</a:t>
+              <a:t>09</a:t>
             </a:r>
             <a:endParaRPr lang="en-US" sz="1600" dirty="0"/>
           </a:p>
@@ -5049,7 +5913,7 @@
       </p:grpSpPr>
       <p:pic>
         <p:nvPicPr>
-          <p:cNvPr id="2" name="Image 0" descr="/Users/dogan/Documents/Vaults/Courses/wiki/classes/media-studies/decks/_build/img/crops/coburn-spires_a664.jpg">    </p:cNvPr>
+          <p:cNvPr id="2" name="Image 0" descr="/Users/dogan/Documents/Vaults/Courses/wiki/classes/media-studies/decks/_build/img/crops/gbh-overhead_a664.jpg">    </p:cNvPr>
           <p:cNvPicPr>
             <a:picLocks noChangeAspect="1"/>
           </p:cNvPicPr>
@@ -5208,7 +6072,7 @@
                 <a:ea typeface="Georgia" pitchFamily="34" charset="-122"/>
                 <a:cs typeface="Georgia" pitchFamily="34" charset="-120"/>
               </a:rPr>
-              <a:t>The photographer climbed to make this frame, and the climb is the argument. From above, the crowd is pattern rather than people, the spires outrank the street, and the smoke is allowed to interrupt the city. A high angle does not simply show a place. It ranks what is in it.</a:t>
+              <a:t>The camera is directly overhead, a position no person in the scene could occupy. From there the cobbles become pattern, the carts become geometry, and the two men in livery are made small, tidy and equal: a concierge and his lobby boy, ranked by the frame before either speaks.</a:t>
             </a:r>
             <a:endParaRPr lang="en-US" sz="1750" dirty="0"/>
           </a:p>
@@ -5278,7 +6142,7 @@
                 <a:ea typeface="Arial" pitchFamily="34" charset="-122"/>
                 <a:cs typeface="Arial" pitchFamily="34" charset="-120"/>
               </a:rPr>
-              <a:t>Alvin Langdon Coburn, St. Paul's and Other Spires, c. 1905</a:t>
+              <a:t>The Grand Budapest Hotel (2014), dir. Wes Anderson</a:t>
             </a:r>
             <a:endParaRPr lang="en-US" sz="950" dirty="0"/>
           </a:p>
@@ -7451,7 +8315,7 @@
     <p:bg>
       <p:bgPr>
         <a:solidFill>
-          <a:srgbClr val="E8EFE7"/>
+          <a:srgbClr val="FAF8F1"/>
         </a:solidFill>
       </p:bgPr>
     </p:bg>
@@ -7477,88 +8341,323 @@
         </p:nvSpPr>
         <p:spPr>
           <a:xfrm>
-            <a:off x="502920" y="548640"/>
-            <a:ext cx="1828800" cy="1828800"/>
-          </a:xfrm>
-          <a:prstGeom prst="rect">
-            <a:avLst/>
-          </a:prstGeom>
-          <a:noFill/>
-          <a:ln/>
-        </p:spPr>
-        <p:txBody>
-          <a:bodyPr wrap="square" lIns="0" tIns="0" rIns="0" bIns="0" rtlCol="0" anchor="t"/>
-          <a:lstStyle/>
-          <a:p>
-            <a:pPr indent="0" marL="0">
-              <a:buNone/>
-            </a:pPr>
-            <a:r>
-              <a:rPr lang="en-US" sz="20000" dirty="0">
-                <a:solidFill>
-                  <a:srgbClr val="A3C1AD"/>
+            <a:off x="822960" y="457200"/>
+            <a:ext cx="6400800" cy="274320"/>
+          </a:xfrm>
+          <a:prstGeom prst="rect">
+            <a:avLst/>
+          </a:prstGeom>
+          <a:noFill/>
+          <a:ln/>
+        </p:spPr>
+        <p:txBody>
+          <a:bodyPr wrap="square" lIns="0" tIns="0" rIns="0" bIns="0" rtlCol="0" anchor="ctr"/>
+          <a:lstStyle/>
+          <a:p>
+            <a:pPr algn="l" indent="0" marL="0">
+              <a:buNone/>
+            </a:pPr>
+            <a:r>
+              <a:rPr lang="en-US" sz="1100" b="1" spc="250" kern="0" dirty="0">
+                <a:solidFill>
+                  <a:srgbClr val="4A6B5D"/>
+                </a:solidFill>
+                <a:latin typeface="Arial" pitchFamily="34" charset="0"/>
+                <a:ea typeface="Arial" pitchFamily="34" charset="-122"/>
+                <a:cs typeface="Arial" pitchFamily="34" charset="-120"/>
+              </a:rPr>
+              <a:t>MOVEMENT</a:t>
+            </a:r>
+            <a:endParaRPr lang="en-US" sz="1100" dirty="0"/>
+          </a:p>
+        </p:txBody>
+      </p:sp>
+      <p:sp>
+        <p:nvSpPr>
+          <p:cNvPr id="3" name="Text 1"/>
+          <p:cNvSpPr/>
+          <p:nvPr/>
+        </p:nvSpPr>
+        <p:spPr>
+          <a:xfrm>
+            <a:off x="6793992" y="457200"/>
+            <a:ext cx="4572000" cy="274320"/>
+          </a:xfrm>
+          <a:prstGeom prst="rect">
+            <a:avLst/>
+          </a:prstGeom>
+          <a:noFill/>
+          <a:ln/>
+        </p:spPr>
+        <p:txBody>
+          <a:bodyPr wrap="square" lIns="0" tIns="0" rIns="0" bIns="0" rtlCol="0" anchor="ctr"/>
+          <a:lstStyle/>
+          <a:p>
+            <a:pPr algn="r" indent="0" marL="0">
+              <a:buNone/>
+            </a:pPr>
+            <a:r>
+              <a:rPr lang="en-US" sz="1100" b="1" spc="250" kern="0" dirty="0">
+                <a:solidFill>
+                  <a:srgbClr val="7A7F72"/>
+                </a:solidFill>
+                <a:latin typeface="Arial" pitchFamily="34" charset="0"/>
+                <a:ea typeface="Arial" pitchFamily="34" charset="-122"/>
+                <a:cs typeface="Arial" pitchFamily="34" charset="-120"/>
+              </a:rPr>
+              <a:t>THE CAMERA REFUSES TO LET GO</a:t>
+            </a:r>
+            <a:endParaRPr lang="en-US" sz="1100" dirty="0"/>
+          </a:p>
+        </p:txBody>
+      </p:sp>
+      <p:sp>
+        <p:nvSpPr>
+          <p:cNvPr id="4" name="Shape 2"/>
+          <p:cNvSpPr/>
+          <p:nvPr/>
+        </p:nvSpPr>
+        <p:spPr>
+          <a:xfrm>
+            <a:off x="822960" y="786384"/>
+            <a:ext cx="10543032" cy="0"/>
+          </a:xfrm>
+          <a:prstGeom prst="line">
+            <a:avLst/>
+          </a:prstGeom>
+          <a:noFill/>
+          <a:ln w="9525">
+            <a:solidFill>
+              <a:srgbClr val="D9D4C4"/>
+            </a:solidFill>
+            <a:prstDash val="solid"/>
+          </a:ln>
+        </p:spPr>
+      </p:sp>
+      <p:sp>
+        <p:nvSpPr>
+          <p:cNvPr id="5" name="Text 3"/>
+          <p:cNvSpPr/>
+          <p:nvPr/>
+        </p:nvSpPr>
+        <p:spPr>
+          <a:xfrm>
+            <a:off x="822960" y="932688"/>
+            <a:ext cx="10543032" cy="640080"/>
+          </a:xfrm>
+          <a:prstGeom prst="rect">
+            <a:avLst/>
+          </a:prstGeom>
+          <a:noFill/>
+          <a:ln/>
+        </p:spPr>
+        <p:txBody>
+          <a:bodyPr wrap="square" lIns="0" tIns="0" rIns="0" bIns="0" rtlCol="0" anchor="ctr"/>
+          <a:lstStyle/>
+          <a:p>
+            <a:pPr indent="0" marL="0">
+              <a:buNone/>
+            </a:pPr>
+            <a:r>
+              <a:rPr lang="en-US" sz="3000" dirty="0">
+                <a:solidFill>
+                  <a:srgbClr val="24313F"/>
                 </a:solidFill>
                 <a:latin typeface="Georgia" pitchFamily="34" charset="0"/>
                 <a:ea typeface="Georgia" pitchFamily="34" charset="-122"/>
                 <a:cs typeface="Georgia" pitchFamily="34" charset="-120"/>
               </a:rPr>
-              <a:t>“</a:t>
-            </a:r>
-            <a:endParaRPr lang="en-US" sz="20000" dirty="0"/>
-          </a:p>
-        </p:txBody>
-      </p:sp>
-      <p:sp>
-        <p:nvSpPr>
-          <p:cNvPr id="3" name="Text 1"/>
-          <p:cNvSpPr/>
-          <p:nvPr/>
-        </p:nvSpPr>
-        <p:spPr>
-          <a:xfrm>
-            <a:off x="822960" y="1783080"/>
-            <a:ext cx="10424160" cy="3291840"/>
-          </a:xfrm>
-          <a:prstGeom prst="rect">
-            <a:avLst/>
-          </a:prstGeom>
-          <a:noFill/>
-          <a:ln/>
-        </p:spPr>
-        <p:txBody>
-          <a:bodyPr wrap="square" lIns="0" tIns="0" rIns="0" bIns="0" rtlCol="0" anchor="ctr"/>
-          <a:lstStyle/>
-          <a:p>
-            <a:pPr indent="0" marL="0">
-              <a:lnSpc>
-                <a:spcPts val="4600"/>
-              </a:lnSpc>
-              <a:buNone/>
-            </a:pPr>
-            <a:r>
-              <a:rPr lang="en-US" sz="3600" dirty="0">
-                <a:solidFill>
-                  <a:srgbClr val="24313F"/>
-                </a:solidFill>
-                <a:latin typeface="Georgia" pitchFamily="34" charset="0"/>
-                <a:ea typeface="Georgia" pitchFamily="34" charset="-122"/>
-                <a:cs typeface="Georgia" pitchFamily="34" charset="-120"/>
-              </a:rPr>
-              <a:t>A series of short, self-contained exercises with camera (or even phone) can combine technical elements with story elements.</a:t>
-            </a:r>
-            <a:endParaRPr lang="en-US" sz="3600" dirty="0"/>
-          </a:p>
-        </p:txBody>
-      </p:sp>
-      <p:sp>
-        <p:nvSpPr>
-          <p:cNvPr id="4" name="Shape 2"/>
-          <p:cNvSpPr/>
-          <p:nvPr/>
-        </p:nvSpPr>
-        <p:spPr>
-          <a:xfrm>
-            <a:off x="822960" y="5029200"/>
+              <a:t>One shot, three minutes, no cut</a:t>
+            </a:r>
+            <a:endParaRPr lang="en-US" sz="3000" dirty="0"/>
+          </a:p>
+        </p:txBody>
+      </p:sp>
+      <p:sp>
+        <p:nvSpPr>
+          <p:cNvPr id="6" name="Shape 4"/>
+          <p:cNvSpPr/>
+          <p:nvPr/>
+        </p:nvSpPr>
+        <p:spPr>
+          <a:xfrm>
+            <a:off x="822960" y="1691640"/>
+            <a:ext cx="5088636" cy="3291840"/>
+          </a:xfrm>
+          <a:prstGeom prst="rect">
+            <a:avLst/>
+          </a:prstGeom>
+          <a:solidFill>
+            <a:srgbClr val="FAF8F1"/>
+          </a:solidFill>
+          <a:ln w="9525">
+            <a:solidFill>
+              <a:srgbClr val="D9D4C4"/>
+            </a:solidFill>
+            <a:prstDash val="solid"/>
+          </a:ln>
+        </p:spPr>
+      </p:sp>
+      <p:pic>
+        <p:nvPicPr>
+          <p:cNvPr id="7" name="Image 0" descr="/Users/dogan/Documents/Vaults/Courses/wiki/classes/media-studies/decks/_build/img/goodfellas-copa-1.jpg">    </p:cNvPr>
+          <p:cNvPicPr>
+            <a:picLocks noChangeAspect="1"/>
+          </p:cNvPicPr>
+          <p:nvPr/>
+        </p:nvPicPr>
+        <p:blipFill>
+          <a:blip r:embed="rId1"/>
+          <a:stretch>
+            <a:fillRect/>
+          </a:stretch>
+        </p:blipFill>
+        <p:spPr>
+          <a:xfrm>
+            <a:off x="950976" y="1981411"/>
+            <a:ext cx="4832604" cy="2712299"/>
+          </a:xfrm>
+          <a:prstGeom prst="rect">
+            <a:avLst/>
+          </a:prstGeom>
+        </p:spPr>
+      </p:pic>
+      <p:sp>
+        <p:nvSpPr>
+          <p:cNvPr id="8" name="Shape 5"/>
+          <p:cNvSpPr/>
+          <p:nvPr/>
+        </p:nvSpPr>
+        <p:spPr>
+          <a:xfrm>
+            <a:off x="6277356" y="1691640"/>
+            <a:ext cx="5088636" cy="3291840"/>
+          </a:xfrm>
+          <a:prstGeom prst="rect">
+            <a:avLst/>
+          </a:prstGeom>
+          <a:solidFill>
+            <a:srgbClr val="FAF8F1"/>
+          </a:solidFill>
+          <a:ln w="9525">
+            <a:solidFill>
+              <a:srgbClr val="D9D4C4"/>
+            </a:solidFill>
+            <a:prstDash val="solid"/>
+          </a:ln>
+        </p:spPr>
+      </p:sp>
+      <p:pic>
+        <p:nvPicPr>
+          <p:cNvPr id="9" name="Image 1" descr="/Users/dogan/Documents/Vaults/Courses/wiki/classes/media-studies/decks/_build/img/goodfellas-copa-2.jpg">    </p:cNvPr>
+          <p:cNvPicPr>
+            <a:picLocks noChangeAspect="1"/>
+          </p:cNvPicPr>
+          <p:nvPr/>
+        </p:nvPicPr>
+        <p:blipFill>
+          <a:blip r:embed="rId2"/>
+          <a:stretch>
+            <a:fillRect/>
+          </a:stretch>
+        </p:blipFill>
+        <p:spPr>
+          <a:xfrm>
+            <a:off x="6405372" y="1981411"/>
+            <a:ext cx="4832604" cy="2712299"/>
+          </a:xfrm>
+          <a:prstGeom prst="rect">
+            <a:avLst/>
+          </a:prstGeom>
+        </p:spPr>
+      </p:pic>
+      <p:sp>
+        <p:nvSpPr>
+          <p:cNvPr id="10" name="Text 6"/>
+          <p:cNvSpPr/>
+          <p:nvPr/>
+        </p:nvSpPr>
+        <p:spPr>
+          <a:xfrm>
+            <a:off x="822960" y="5056632"/>
+            <a:ext cx="5088636" cy="320040"/>
+          </a:xfrm>
+          <a:prstGeom prst="rect">
+            <a:avLst/>
+          </a:prstGeom>
+          <a:noFill/>
+          <a:ln/>
+        </p:spPr>
+        <p:txBody>
+          <a:bodyPr wrap="square" lIns="0" tIns="0" rIns="0" bIns="0" rtlCol="0" anchor="ctr"/>
+          <a:lstStyle/>
+          <a:p>
+            <a:pPr algn="ctr" indent="0" marL="0">
+              <a:buNone/>
+            </a:pPr>
+            <a:r>
+              <a:rPr lang="en-US" sz="1050" dirty="0">
+                <a:solidFill>
+                  <a:srgbClr val="7A7F72"/>
+                </a:solidFill>
+                <a:latin typeface="Arial" pitchFamily="34" charset="0"/>
+                <a:ea typeface="Arial" pitchFamily="34" charset="-122"/>
+                <a:cs typeface="Arial" pitchFamily="34" charset="-120"/>
+              </a:rPr>
+              <a:t>Past the queue, in at the side door</a:t>
+            </a:r>
+            <a:endParaRPr lang="en-US" sz="1050" dirty="0"/>
+          </a:p>
+        </p:txBody>
+      </p:sp>
+      <p:sp>
+        <p:nvSpPr>
+          <p:cNvPr id="11" name="Text 7"/>
+          <p:cNvSpPr/>
+          <p:nvPr/>
+        </p:nvSpPr>
+        <p:spPr>
+          <a:xfrm>
+            <a:off x="6277356" y="5056632"/>
+            <a:ext cx="5088636" cy="320040"/>
+          </a:xfrm>
+          <a:prstGeom prst="rect">
+            <a:avLst/>
+          </a:prstGeom>
+          <a:noFill/>
+          <a:ln/>
+        </p:spPr>
+        <p:txBody>
+          <a:bodyPr wrap="square" lIns="0" tIns="0" rIns="0" bIns="0" rtlCol="0" anchor="ctr"/>
+          <a:lstStyle/>
+          <a:p>
+            <a:pPr algn="ctr" indent="0" marL="0">
+              <a:buNone/>
+            </a:pPr>
+            <a:r>
+              <a:rPr lang="en-US" sz="1050" dirty="0">
+                <a:solidFill>
+                  <a:srgbClr val="7A7F72"/>
+                </a:solidFill>
+                <a:latin typeface="Arial" pitchFamily="34" charset="0"/>
+                <a:ea typeface="Arial" pitchFamily="34" charset="-122"/>
+                <a:cs typeface="Arial" pitchFamily="34" charset="-120"/>
+              </a:rPr>
+              <a:t>Down the corridor, no cut, still going</a:t>
+            </a:r>
+            <a:endParaRPr lang="en-US" sz="1050" dirty="0"/>
+          </a:p>
+        </p:txBody>
+      </p:sp>
+      <p:sp>
+        <p:nvSpPr>
+          <p:cNvPr id="12" name="Shape 8"/>
+          <p:cNvSpPr/>
+          <p:nvPr/>
+        </p:nvSpPr>
+        <p:spPr>
+          <a:xfrm>
+            <a:off x="822960" y="5623560"/>
             <a:ext cx="914400" cy="0"/>
           </a:xfrm>
           <a:prstGeom prst="line">
@@ -7575,40 +8674,144 @@
       </p:sp>
       <p:sp>
         <p:nvSpPr>
-          <p:cNvPr id="5" name="Text 3"/>
-          <p:cNvSpPr/>
-          <p:nvPr/>
-        </p:nvSpPr>
-        <p:spPr>
-          <a:xfrm>
-            <a:off x="822960" y="5212080"/>
-            <a:ext cx="10058400" cy="457200"/>
-          </a:xfrm>
-          <a:prstGeom prst="rect">
-            <a:avLst/>
-          </a:prstGeom>
-          <a:noFill/>
-          <a:ln/>
-        </p:spPr>
-        <p:txBody>
-          <a:bodyPr wrap="square" lIns="0" tIns="0" rIns="0" bIns="0" rtlCol="0" anchor="ctr"/>
-          <a:lstStyle/>
-          <a:p>
-            <a:pPr indent="0" marL="0">
-              <a:buNone/>
-            </a:pPr>
-            <a:r>
-              <a:rPr lang="en-US" sz="1400" spc="100" kern="0" dirty="0">
+          <p:cNvPr id="13" name="Text 9"/>
+          <p:cNvSpPr/>
+          <p:nvPr/>
+        </p:nvSpPr>
+        <p:spPr>
+          <a:xfrm>
+            <a:off x="822960" y="5760720"/>
+            <a:ext cx="10515600" cy="548640"/>
+          </a:xfrm>
+          <a:prstGeom prst="rect">
+            <a:avLst/>
+          </a:prstGeom>
+          <a:noFill/>
+          <a:ln/>
+        </p:spPr>
+        <p:txBody>
+          <a:bodyPr wrap="square" lIns="0" tIns="0" rIns="0" bIns="0" rtlCol="0" anchor="t"/>
+          <a:lstStyle/>
+          <a:p>
+            <a:pPr indent="0" marL="0">
+              <a:lnSpc>
+                <a:spcPts val="1800"/>
+              </a:lnSpc>
+              <a:buNone/>
+            </a:pPr>
+            <a:r>
+              <a:rPr lang="en-US" sz="1350" i="1" dirty="0">
                 <a:solidFill>
                   <a:srgbClr val="4A6B5D"/>
+                </a:solidFill>
+                <a:latin typeface="Georgia" pitchFamily="34" charset="0"/>
+                <a:ea typeface="Georgia" pitchFamily="34" charset="-122"/>
+                <a:cs typeface="Georgia" pitchFamily="34" charset="-120"/>
+              </a:rPr>
+              <a:t>Goodfellas (1990): the Copacabana steadicam shot. The camera follows Henry through the back door, and the unbroken glide is the meaning: doors open for him, and we are swept in as his guest.</a:t>
+            </a:r>
+            <a:endParaRPr lang="en-US" sz="1350" dirty="0"/>
+          </a:p>
+        </p:txBody>
+      </p:sp>
+      <p:sp>
+        <p:nvSpPr>
+          <p:cNvPr id="14" name="Shape 10"/>
+          <p:cNvSpPr/>
+          <p:nvPr/>
+        </p:nvSpPr>
+        <p:spPr>
+          <a:xfrm>
+            <a:off x="822960" y="6382512"/>
+            <a:ext cx="10543032" cy="0"/>
+          </a:xfrm>
+          <a:prstGeom prst="line">
+            <a:avLst/>
+          </a:prstGeom>
+          <a:noFill/>
+          <a:ln w="9525">
+            <a:solidFill>
+              <a:srgbClr val="D9D4C4"/>
+            </a:solidFill>
+            <a:prstDash val="solid"/>
+          </a:ln>
+        </p:spPr>
+      </p:sp>
+      <p:sp>
+        <p:nvSpPr>
+          <p:cNvPr id="15" name="Text 11"/>
+          <p:cNvSpPr/>
+          <p:nvPr/>
+        </p:nvSpPr>
+        <p:spPr>
+          <a:xfrm>
+            <a:off x="822960" y="6419088"/>
+            <a:ext cx="7315200" cy="274320"/>
+          </a:xfrm>
+          <a:prstGeom prst="rect">
+            <a:avLst/>
+          </a:prstGeom>
+          <a:noFill/>
+          <a:ln/>
+        </p:spPr>
+        <p:txBody>
+          <a:bodyPr wrap="square" lIns="0" tIns="0" rIns="0" bIns="0" rtlCol="0" anchor="ctr"/>
+          <a:lstStyle/>
+          <a:p>
+            <a:pPr indent="0" marL="0">
+              <a:buNone/>
+            </a:pPr>
+            <a:r>
+              <a:rPr lang="en-US" sz="900" spc="150" kern="0" dirty="0">
+                <a:solidFill>
+                  <a:srgbClr val="7A7F72"/>
                 </a:solidFill>
                 <a:latin typeface="Arial" pitchFamily="34" charset="0"/>
                 <a:ea typeface="Arial" pitchFamily="34" charset="-122"/>
                 <a:cs typeface="Arial" pitchFamily="34" charset="-120"/>
               </a:rPr>
-              <a:t>Cambridge Scheme of Work, Foundation Portfolio</a:t>
-            </a:r>
-            <a:endParaRPr lang="en-US" sz="1400" dirty="0"/>
+              <a:t>MEDIA STUDIES 9607 · SEMESTER I</a:t>
+            </a:r>
+            <a:endParaRPr lang="en-US" sz="900" dirty="0"/>
+          </a:p>
+        </p:txBody>
+      </p:sp>
+      <p:sp>
+        <p:nvSpPr>
+          <p:cNvPr id="16" name="Text 12"/>
+          <p:cNvSpPr/>
+          <p:nvPr/>
+        </p:nvSpPr>
+        <p:spPr>
+          <a:xfrm>
+            <a:off x="10268712" y="6355080"/>
+            <a:ext cx="1097280" cy="365760"/>
+          </a:xfrm>
+          <a:prstGeom prst="rect">
+            <a:avLst/>
+          </a:prstGeom>
+          <a:noFill/>
+          <a:ln/>
+        </p:spPr>
+        <p:txBody>
+          <a:bodyPr wrap="square" lIns="0" tIns="0" rIns="0" bIns="0" rtlCol="0" anchor="ctr"/>
+          <a:lstStyle/>
+          <a:p>
+            <a:pPr algn="r" indent="0" marL="0">
+              <a:buNone/>
+            </a:pPr>
+            <a:r>
+              <a:rPr lang="en-US" sz="1600" dirty="0">
+                <a:solidFill>
+                  <a:srgbClr val="A3C1AD"/>
+                </a:solidFill>
+                <a:latin typeface="Georgia" pitchFamily="34" charset="0"/>
+                <a:ea typeface="Georgia" pitchFamily="34" charset="-122"/>
+                <a:cs typeface="Georgia" pitchFamily="34" charset="-120"/>
+              </a:rPr>
+              <a:t>05</a:t>
+            </a:r>
+            <a:endParaRPr lang="en-US" sz="1600" dirty="0"/>
           </a:p>
         </p:txBody>
       </p:sp>
